--- a/docs/presentation/BIET-Denovo-10min.pptx
+++ b/docs/presentation/BIET-Denovo-10min.pptx
@@ -1144,6 +1144,8 @@
             <a:r>
               <a:rPr lang="en-US" dirty="0"/>
               <a:t>60 seconds. This is the pivot from problem to product.
+Lead with the left card, and lead with the second figure not the first. "A budget impact analysis returns two things. First, what it costs: €296.6 million over five years, which is thirteen cents per covered member per month. Quote both, in that order, because the second is the unit the payer negotiates on."
+Then the lower half, which is the part that matters for an early-stage asset: "Second, it tells you which assumption the answer actually turns on. Here it is the new drug's annual price, ranked first of ten. That is where the next evidence spend goes." At this stage every input is an estimate, so knowing which estimate to go and firm up is worth more than the point figure.
 "BIET turns population data into a five-year payer forecast in a single sitting, with the scenarios, the sensitivity and the audit trail attached."
 Take the three points in order, one sentence each. Point 1 is the engineering decision that makes the demo work. Point 3 is the one that makes the answer defensible.
 Do not oversell. The claim is 10 minutes to a defensible early-stage estimate, not a validated HTA submission.</a:t>
@@ -7555,11 +7557,11 @@
         <p:spPr>
           <a:xfrm>
             <a:off x="566928" y="2194560"/>
-            <a:ext cx="4114800" cy="3218688"/>
+            <a:ext cx="4114800" cy="3639312"/>
           </a:xfrm>
           <a:prstGeom prst="roundRect">
             <a:avLst>
-              <a:gd name="adj" fmla="val 1705"/>
+              <a:gd name="adj" fmla="val 1508"/>
             </a:avLst>
           </a:prstGeom>
           <a:solidFill>
@@ -7583,7 +7585,7 @@
         </p:nvSpPr>
         <p:spPr>
           <a:xfrm>
-            <a:off x="950976" y="2523744"/>
+            <a:off x="950976" y="2450592"/>
             <a:ext cx="3383280" cy="237744"/>
           </a:xfrm>
           <a:prstGeom prst="rect">
@@ -7608,7 +7610,7 @@
                 <a:ea typeface="Times New Roman" pitchFamily="34" charset="-122"/>
                 <a:cs typeface="Times New Roman" pitchFamily="34" charset="-120"/>
               </a:rPr>
-              <a:t>HEADLINE OUTCOME</a:t>
+              <a:t>AFFORDABILITY</a:t>
             </a:r>
             <a:endParaRPr lang="en-US" sz="1100" dirty="0"/>
           </a:p>
@@ -7622,24 +7624,24 @@
         </p:nvSpPr>
         <p:spPr>
           <a:xfrm>
-            <a:off x="914400" y="2944368"/>
-            <a:ext cx="3474720" cy="914400"/>
-          </a:xfrm>
-          <a:prstGeom prst="rect">
-            <a:avLst/>
-          </a:prstGeom>
-          <a:noFill/>
-          <a:ln/>
-        </p:spPr>
-        <p:txBody>
-          <a:bodyPr wrap="square" lIns="0" tIns="0" rIns="0" bIns="0" rtlCol="0" anchor="ctr"/>
-          <a:lstStyle/>
-          <a:p>
-            <a:pPr indent="0" marL="0">
-              <a:buNone/>
-            </a:pPr>
-            <a:r>
-              <a:rPr lang="en-US" sz="6200" b="1" dirty="0">
+            <a:off x="914400" y="2706624"/>
+            <a:ext cx="3474720" cy="731520"/>
+          </a:xfrm>
+          <a:prstGeom prst="rect">
+            <a:avLst/>
+          </a:prstGeom>
+          <a:noFill/>
+          <a:ln/>
+        </p:spPr>
+        <p:txBody>
+          <a:bodyPr wrap="square" lIns="0" tIns="0" rIns="0" bIns="0" rtlCol="0" anchor="ctr"/>
+          <a:lstStyle/>
+          <a:p>
+            <a:pPr indent="0" marL="0">
+              <a:buNone/>
+            </a:pPr>
+            <a:r>
+              <a:rPr lang="en-US" sz="4600" b="1" dirty="0">
                 <a:solidFill>
                   <a:srgbClr val="FFFFFF"/>
                 </a:solidFill>
@@ -7647,9 +7649,9 @@
                 <a:ea typeface="Times New Roman" pitchFamily="34" charset="-122"/>
                 <a:cs typeface="Times New Roman" pitchFamily="34" charset="-120"/>
               </a:rPr>
-              <a:t>10 min</a:t>
-            </a:r>
-            <a:endParaRPr lang="en-US" sz="6200" dirty="0"/>
+              <a:t>€0.13</a:t>
+            </a:r>
+            <a:endParaRPr lang="en-US" sz="4600" dirty="0"/>
           </a:p>
         </p:txBody>
       </p:sp>
@@ -7661,27 +7663,27 @@
         </p:nvSpPr>
         <p:spPr>
           <a:xfrm>
-            <a:off x="950976" y="4041648"/>
-            <a:ext cx="3383280" cy="1005840"/>
-          </a:xfrm>
-          <a:prstGeom prst="rect">
-            <a:avLst/>
-          </a:prstGeom>
-          <a:noFill/>
-          <a:ln/>
-        </p:spPr>
-        <p:txBody>
-          <a:bodyPr wrap="square" lIns="0" tIns="0" rIns="0" bIns="0" rtlCol="0" anchor="ctr"/>
+            <a:off x="950976" y="3511296"/>
+            <a:ext cx="3383280" cy="822960"/>
+          </a:xfrm>
+          <a:prstGeom prst="rect">
+            <a:avLst/>
+          </a:prstGeom>
+          <a:noFill/>
+          <a:ln/>
+        </p:spPr>
+        <p:txBody>
+          <a:bodyPr wrap="square" lIns="0" tIns="0" rIns="0" bIns="0" rtlCol="0" anchor="t"/>
           <a:lstStyle/>
           <a:p>
             <a:pPr indent="0" marL="0">
               <a:lnSpc>
-                <a:spcPct val="112000"/>
+                <a:spcPct val="110000"/>
               </a:lnSpc>
               <a:buNone/>
             </a:pPr>
             <a:r>
-              <a:rPr lang="en-US" sz="1400" dirty="0">
+              <a:rPr lang="en-US" sz="1300" dirty="0">
                 <a:solidFill>
                   <a:srgbClr val="E4DFFC"/>
                 </a:solidFill>
@@ -7689,15 +7691,135 @@
                 <a:ea typeface="Times New Roman" pitchFamily="34" charset="-122"/>
                 <a:cs typeface="Times New Roman" pitchFamily="34" charset="-120"/>
               </a:rPr>
-              <a:t>to build a five-year model and stress-test it, against weeks of bespoke spreadsheet work.</a:t>
-            </a:r>
-            <a:endParaRPr lang="en-US" sz="1400" dirty="0"/>
-          </a:p>
-        </p:txBody>
-      </p:sp>
-      <p:sp>
-        <p:nvSpPr>
-          <p:cNvPr id="9" name="Shape 7"/>
+              <a:t>per covered member per month. The same fact as €296.6M over five years, in the unit a payer negotiates on.</a:t>
+            </a:r>
+            <a:endParaRPr lang="en-US" sz="1300" dirty="0"/>
+          </a:p>
+        </p:txBody>
+      </p:sp>
+      <p:sp>
+        <p:nvSpPr>
+          <p:cNvPr id="9" name="Text 7"/>
+          <p:cNvSpPr txBox="1"/>
+          <p:nvPr/>
+        </p:nvSpPr>
+        <p:spPr>
+          <a:xfrm>
+            <a:off x="950976" y="4480560"/>
+            <a:ext cx="3383280" cy="237744"/>
+          </a:xfrm>
+          <a:prstGeom prst="rect">
+            <a:avLst/>
+          </a:prstGeom>
+          <a:noFill/>
+          <a:ln/>
+        </p:spPr>
+        <p:txBody>
+          <a:bodyPr wrap="square" lIns="0" tIns="0" rIns="0" bIns="0" rtlCol="0" anchor="ctr"/>
+          <a:lstStyle/>
+          <a:p>
+            <a:pPr indent="0" marL="0">
+              <a:buNone/>
+            </a:pPr>
+            <a:r>
+              <a:rPr lang="en-US" sz="1100" b="1" spc="200" kern="0" dirty="0">
+                <a:solidFill>
+                  <a:srgbClr val="D9D2FA"/>
+                </a:solidFill>
+                <a:latin typeface="Times New Roman" pitchFamily="34" charset="0"/>
+                <a:ea typeface="Times New Roman" pitchFamily="34" charset="-122"/>
+                <a:cs typeface="Times New Roman" pitchFamily="34" charset="-120"/>
+              </a:rPr>
+              <a:t>WHAT DECIDES IT</a:t>
+            </a:r>
+            <a:endParaRPr lang="en-US" sz="1100" dirty="0"/>
+          </a:p>
+        </p:txBody>
+      </p:sp>
+      <p:sp>
+        <p:nvSpPr>
+          <p:cNvPr id="10" name="Text 8"/>
+          <p:cNvSpPr txBox="1"/>
+          <p:nvPr/>
+        </p:nvSpPr>
+        <p:spPr>
+          <a:xfrm>
+            <a:off x="932688" y="4736592"/>
+            <a:ext cx="3474720" cy="310896"/>
+          </a:xfrm>
+          <a:prstGeom prst="rect">
+            <a:avLst/>
+          </a:prstGeom>
+          <a:noFill/>
+          <a:ln/>
+        </p:spPr>
+        <p:txBody>
+          <a:bodyPr wrap="square" lIns="0" tIns="0" rIns="0" bIns="0" rtlCol="0" anchor="ctr"/>
+          <a:lstStyle/>
+          <a:p>
+            <a:pPr indent="0" marL="0">
+              <a:buNone/>
+            </a:pPr>
+            <a:r>
+              <a:rPr lang="en-US" sz="2000" b="1" dirty="0">
+                <a:solidFill>
+                  <a:srgbClr val="FFFFFF"/>
+                </a:solidFill>
+                <a:latin typeface="Times New Roman" pitchFamily="34" charset="0"/>
+                <a:ea typeface="Times New Roman" pitchFamily="34" charset="-122"/>
+                <a:cs typeface="Times New Roman" pitchFamily="34" charset="-120"/>
+              </a:rPr>
+              <a:t>New drug annual price</a:t>
+            </a:r>
+            <a:endParaRPr lang="en-US" sz="2000" dirty="0"/>
+          </a:p>
+        </p:txBody>
+      </p:sp>
+      <p:sp>
+        <p:nvSpPr>
+          <p:cNvPr id="11" name="Text 9"/>
+          <p:cNvSpPr txBox="1"/>
+          <p:nvPr/>
+        </p:nvSpPr>
+        <p:spPr>
+          <a:xfrm>
+            <a:off x="950976" y="5084064"/>
+            <a:ext cx="3383280" cy="694944"/>
+          </a:xfrm>
+          <a:prstGeom prst="rect">
+            <a:avLst/>
+          </a:prstGeom>
+          <a:noFill/>
+          <a:ln/>
+        </p:spPr>
+        <p:txBody>
+          <a:bodyPr wrap="square" lIns="0" tIns="0" rIns="0" bIns="0" rtlCol="0" anchor="t"/>
+          <a:lstStyle/>
+          <a:p>
+            <a:pPr indent="0" marL="0">
+              <a:lnSpc>
+                <a:spcPct val="110000"/>
+              </a:lnSpc>
+              <a:buNone/>
+            </a:pPr>
+            <a:r>
+              <a:rPr lang="en-US" sz="1300" dirty="0">
+                <a:solidFill>
+                  <a:srgbClr val="E4DFFC"/>
+                </a:solidFill>
+                <a:latin typeface="Times New Roman" pitchFamily="34" charset="0"/>
+                <a:ea typeface="Times New Roman" pitchFamily="34" charset="-122"/>
+                <a:cs typeface="Times New Roman" pitchFamily="34" charset="-120"/>
+              </a:rPr>
+              <a:t>Ranked first of ten assumptions, each moved ±20%. Evidence spend goes where it changes the answer.</a:t>
+            </a:r>
+            <a:endParaRPr lang="en-US" sz="1300" dirty="0"/>
+          </a:p>
+        </p:txBody>
+      </p:sp>
+      <p:sp>
+        <p:nvSpPr>
+          <p:cNvPr id="12" name="Shape 10"/>
           <p:cNvSpPr/>
           <p:nvPr/>
         </p:nvSpPr>
@@ -7719,7 +7841,7 @@
       </p:sp>
       <p:sp>
         <p:nvSpPr>
-          <p:cNvPr id="10" name="Text 8"/>
+          <p:cNvPr id="13" name="Text 11"/>
           <p:cNvSpPr txBox="1"/>
           <p:nvPr/>
         </p:nvSpPr>
@@ -7758,7 +7880,7 @@
       </p:sp>
       <p:sp>
         <p:nvSpPr>
-          <p:cNvPr id="11" name="Text 9"/>
+          <p:cNvPr id="14" name="Text 12"/>
           <p:cNvSpPr txBox="1"/>
           <p:nvPr/>
         </p:nvSpPr>
@@ -7797,7 +7919,7 @@
       </p:sp>
       <p:sp>
         <p:nvSpPr>
-          <p:cNvPr id="12" name="Text 10"/>
+          <p:cNvPr id="15" name="Text 13"/>
           <p:cNvSpPr txBox="1"/>
           <p:nvPr/>
         </p:nvSpPr>
@@ -7831,7 +7953,7 @@
                 <a:ea typeface="Times New Roman" pitchFamily="34" charset="-122"/>
                 <a:cs typeface="Times New Roman" pitchFamily="34" charset="-120"/>
               </a:rPr>
-              <a:t>No network call sits between an input and its result, so sensitivity is something you feel rather than a job you queue.</a:t>
+              <a:t>No network call sits between an input and its result. A five-year model takes minutes to build and seconds to re-run, against weeks of spreadsheet work.</a:t>
             </a:r>
             <a:endParaRPr lang="en-US" sz="1300" dirty="0"/>
           </a:p>
@@ -7839,7 +7961,7 @@
       </p:sp>
       <p:sp>
         <p:nvSpPr>
-          <p:cNvPr id="13" name="Shape 11"/>
+          <p:cNvPr id="16" name="Shape 14"/>
           <p:cNvSpPr/>
           <p:nvPr/>
         </p:nvSpPr>
@@ -7861,7 +7983,7 @@
       </p:sp>
       <p:sp>
         <p:nvSpPr>
-          <p:cNvPr id="14" name="Text 12"/>
+          <p:cNvPr id="17" name="Text 15"/>
           <p:cNvSpPr txBox="1"/>
           <p:nvPr/>
         </p:nvSpPr>
@@ -7900,7 +8022,7 @@
       </p:sp>
       <p:sp>
         <p:nvSpPr>
-          <p:cNvPr id="15" name="Text 13"/>
+          <p:cNvPr id="18" name="Text 16"/>
           <p:cNvSpPr txBox="1"/>
           <p:nvPr/>
         </p:nvSpPr>
@@ -7939,7 +8061,7 @@
       </p:sp>
       <p:sp>
         <p:nvSpPr>
-          <p:cNvPr id="16" name="Text 14"/>
+          <p:cNvPr id="19" name="Text 17"/>
           <p:cNvSpPr txBox="1"/>
           <p:nvPr/>
         </p:nvSpPr>
@@ -7981,7 +8103,7 @@
       </p:sp>
       <p:sp>
         <p:nvSpPr>
-          <p:cNvPr id="17" name="Shape 15"/>
+          <p:cNvPr id="20" name="Shape 18"/>
           <p:cNvSpPr/>
           <p:nvPr/>
         </p:nvSpPr>
@@ -8003,7 +8125,7 @@
       </p:sp>
       <p:sp>
         <p:nvSpPr>
-          <p:cNvPr id="18" name="Text 16"/>
+          <p:cNvPr id="21" name="Text 19"/>
           <p:cNvSpPr txBox="1"/>
           <p:nvPr/>
         </p:nvSpPr>
@@ -8042,7 +8164,7 @@
       </p:sp>
       <p:sp>
         <p:nvSpPr>
-          <p:cNvPr id="19" name="Text 17"/>
+          <p:cNvPr id="22" name="Text 20"/>
           <p:cNvSpPr txBox="1"/>
           <p:nvPr/>
         </p:nvSpPr>
@@ -8081,7 +8203,7 @@
       </p:sp>
       <p:sp>
         <p:nvSpPr>
-          <p:cNvPr id="20" name="Text 18"/>
+          <p:cNvPr id="23" name="Text 21"/>
           <p:cNvSpPr txBox="1"/>
           <p:nvPr/>
         </p:nvSpPr>
@@ -8123,7 +8245,7 @@
       </p:sp>
       <p:sp>
         <p:nvSpPr>
-          <p:cNvPr id="22" name="Text 19"/>
+          <p:cNvPr id="25" name="Text 22"/>
           <p:cNvSpPr txBox="1"/>
           <p:nvPr/>
         </p:nvSpPr>
@@ -8162,7 +8284,7 @@
       </p:sp>
       <p:sp>
         <p:nvSpPr>
-          <p:cNvPr id="23" name="Text 20"/>
+          <p:cNvPr id="26" name="Text 23"/>
           <p:cNvSpPr txBox="1"/>
           <p:nvPr/>
         </p:nvSpPr>

--- a/docs/presentation/BIET-Denovo-10min.pptx
+++ b/docs/presentation/BIET-Denovo-10min.pptx
@@ -2652,45 +2652,6 @@
           </a:p>
         </p:txBody>
       </p:sp>
-      <p:sp>
-        <p:nvSpPr>
-          <p:cNvPr id="17" name="Text 15"/>
-          <p:cNvSpPr txBox="1"/>
-          <p:nvPr/>
-        </p:nvSpPr>
-        <p:spPr>
-          <a:xfrm>
-            <a:off x="7052767" y="5989320"/>
-            <a:ext cx="4572000" cy="274320"/>
-          </a:xfrm>
-          <a:prstGeom prst="rect">
-            <a:avLst/>
-          </a:prstGeom>
-          <a:noFill/>
-          <a:ln/>
-        </p:spPr>
-        <p:txBody>
-          <a:bodyPr wrap="square" lIns="0" tIns="0" rIns="0" bIns="0" rtlCol="0" anchor="ctr"/>
-          <a:lstStyle/>
-          <a:p>
-            <a:pPr algn="r" indent="0" marL="0">
-              <a:buNone/>
-            </a:pPr>
-            <a:r>
-              <a:rPr lang="en-US" sz="1300" dirty="0">
-                <a:solidFill>
-                  <a:srgbClr val="B9B3E8"/>
-                </a:solidFill>
-                <a:latin typeface="Times New Roman" pitchFamily="34" charset="0"/>
-                <a:ea typeface="Times New Roman" pitchFamily="34" charset="-122"/>
-                <a:cs typeface="Times New Roman" pitchFamily="34" charset="-120"/>
-              </a:rPr>
-              <a:t>10-minute presentation  ·  Round 2</a:t>
-            </a:r>
-            <a:endParaRPr lang="en-US" sz="1300" dirty="0"/>
-          </a:p>
-        </p:txBody>
-      </p:sp>
     </p:spTree>
   </p:cSld>
   <p:clrMapOvr>

--- a/docs/presentation/BIET-Denovo-10min.pptx
+++ b/docs/presentation/BIET-Denovo-10min.pptx
@@ -1606,7 +1606,9 @@
             <a:r>
               <a:rPr lang="en-US" dirty="0"/>
               <a:t>30 seconds, and no longer. Names and one workstream each.
-CHECK THE ROLES BEFORE YOU PRESENT. They were assigned from the workstreams visible in the repository, not from who actually did what. Swap them so each person owns what they can answer questions about in Q&amp;A, because that is the only reason this slide is here.
+Cards run alphabetically by first name, so nobody reads as ranked above anyone else.
+Two of the five are confirmed: Nilesh owns the evidence module, Sumithra owns the backend and the database. The other three titles were split across the remaining workstreams in the repository rather than from who actually did what, so check them. Each person should own the area they can answer questions about, because that is the only reason this slide is here.
+To drop in photographs: click a circle, Format Shape, Fill, Picture, then delete the initials text box sitting over it.
 If everyone is on camera, let each person say their own name and line. It is faster than one person reading five cards, and it puts a face against the workstream the judges may want to question.</a:t>
             </a:r>
             <a:endParaRPr lang="en-US" dirty="0"/>
@@ -13198,12 +13200,12 @@
         </p:nvSpPr>
         <p:spPr>
           <a:xfrm>
-            <a:off x="566928" y="2286000"/>
-            <a:ext cx="2006742" cy="3127248"/>
+            <a:off x="566928" y="2231136"/>
+            <a:ext cx="1992112" cy="3639312"/>
           </a:xfrm>
           <a:prstGeom prst="roundRect">
             <a:avLst>
-              <a:gd name="adj" fmla="val 2734"/>
+              <a:gd name="adj" fmla="val 2754"/>
             </a:avLst>
           </a:prstGeom>
           <a:solidFill>
@@ -13227,8 +13229,8 @@
         </p:nvSpPr>
         <p:spPr>
           <a:xfrm>
-            <a:off x="1177107" y="2615184"/>
-            <a:ext cx="786384" cy="786384"/>
+            <a:off x="968624" y="2560320"/>
+            <a:ext cx="1188720" cy="1188720"/>
           </a:xfrm>
           <a:prstGeom prst="roundRect">
             <a:avLst>
@@ -13249,8 +13251,8 @@
         </p:nvSpPr>
         <p:spPr>
           <a:xfrm>
-            <a:off x="1177107" y="2615184"/>
-            <a:ext cx="786384" cy="786384"/>
+            <a:off x="968624" y="2560320"/>
+            <a:ext cx="1188720" cy="1188720"/>
           </a:xfrm>
           <a:prstGeom prst="rect">
             <a:avLst/>
@@ -13266,7 +13268,7 @@
               <a:buNone/>
             </a:pPr>
             <a:r>
-              <a:rPr lang="en-US" sz="2200" b="1" dirty="0">
+              <a:rPr lang="en-US" sz="3000" b="1" dirty="0">
                 <a:solidFill>
                   <a:srgbClr val="FFFFFF"/>
                 </a:solidFill>
@@ -13274,9 +13276,9 @@
                 <a:ea typeface="Times New Roman" pitchFamily="34" charset="-122"/>
                 <a:cs typeface="Times New Roman" pitchFamily="34" charset="-120"/>
               </a:rPr>
-              <a:t>SR</a:t>
-            </a:r>
-            <a:endParaRPr lang="en-US" sz="2200" dirty="0"/>
+              <a:t>AK</a:t>
+            </a:r>
+            <a:endParaRPr lang="en-US" sz="3000" dirty="0"/>
           </a:p>
         </p:txBody>
       </p:sp>
@@ -13288,8 +13290,8 @@
         </p:nvSpPr>
         <p:spPr>
           <a:xfrm>
-            <a:off x="749808" y="3602736"/>
-            <a:ext cx="1640982" cy="512064"/>
+            <a:off x="713232" y="3950208"/>
+            <a:ext cx="1699504" cy="310896"/>
           </a:xfrm>
           <a:prstGeom prst="rect">
             <a:avLst/>
@@ -13302,9 +13304,6 @@
           <a:lstStyle/>
           <a:p>
             <a:pPr algn="ctr" indent="0" marL="0">
-              <a:lnSpc>
-                <a:spcPct val="100000"/>
-              </a:lnSpc>
               <a:buNone/>
             </a:pPr>
             <a:r>
@@ -13316,7 +13315,7 @@
                 <a:ea typeface="Times New Roman" pitchFamily="34" charset="-122"/>
                 <a:cs typeface="Times New Roman" pitchFamily="34" charset="-120"/>
               </a:rPr>
-              <a:t>Sumithra Raju</a:t>
+              <a:t>Atharva Kadam</a:t>
             </a:r>
             <a:endParaRPr lang="en-US" sz="1500" dirty="0"/>
           </a:p>
@@ -13330,17 +13329,17 @@
         </p:nvSpPr>
         <p:spPr>
           <a:xfrm>
-            <a:off x="731520" y="4114800"/>
-            <a:ext cx="1677558" cy="420624"/>
-          </a:xfrm>
-          <a:prstGeom prst="rect">
-            <a:avLst/>
-          </a:prstGeom>
-          <a:noFill/>
-          <a:ln/>
-        </p:spPr>
-        <p:txBody>
-          <a:bodyPr wrap="square" lIns="0" tIns="0" rIns="0" bIns="0" rtlCol="0" anchor="ctr"/>
+            <a:off x="694944" y="4315968"/>
+            <a:ext cx="1736080" cy="457200"/>
+          </a:xfrm>
+          <a:prstGeom prst="rect">
+            <a:avLst/>
+          </a:prstGeom>
+          <a:noFill/>
+          <a:ln/>
+        </p:spPr>
+        <p:txBody>
+          <a:bodyPr wrap="square" lIns="0" tIns="0" rIns="0" bIns="0" rtlCol="0" anchor="t"/>
           <a:lstStyle/>
           <a:p>
             <a:pPr algn="ctr" indent="0" marL="0">
@@ -13372,17 +13371,17 @@
         </p:nvSpPr>
         <p:spPr>
           <a:xfrm>
-            <a:off x="768096" y="4590288"/>
-            <a:ext cx="1604406" cy="713232"/>
-          </a:xfrm>
-          <a:prstGeom prst="rect">
-            <a:avLst/>
-          </a:prstGeom>
-          <a:noFill/>
-          <a:ln/>
-        </p:spPr>
-        <p:txBody>
-          <a:bodyPr wrap="square" lIns="0" tIns="0" rIns="0" bIns="0" rtlCol="0" anchor="ctr"/>
+            <a:off x="713232" y="4864608"/>
+            <a:ext cx="1699504" cy="841248"/>
+          </a:xfrm>
+          <a:prstGeom prst="rect">
+            <a:avLst/>
+          </a:prstGeom>
+          <a:noFill/>
+          <a:ln/>
+        </p:spPr>
+        <p:txBody>
+          <a:bodyPr wrap="square" lIns="0" tIns="0" rIns="0" bIns="0" rtlCol="0" anchor="t"/>
           <a:lstStyle/>
           <a:p>
             <a:pPr algn="ctr" indent="0" marL="0">
@@ -13414,12 +13413,12 @@
         </p:nvSpPr>
         <p:spPr>
           <a:xfrm>
-            <a:off x="2829702" y="2286000"/>
-            <a:ext cx="2006742" cy="3127248"/>
+            <a:off x="2833360" y="2231136"/>
+            <a:ext cx="1992112" cy="3639312"/>
           </a:xfrm>
           <a:prstGeom prst="roundRect">
             <a:avLst>
-              <a:gd name="adj" fmla="val 2734"/>
+              <a:gd name="adj" fmla="val 2754"/>
             </a:avLst>
           </a:prstGeom>
           <a:solidFill>
@@ -13443,8 +13442,8 @@
         </p:nvSpPr>
         <p:spPr>
           <a:xfrm>
-            <a:off x="3439881" y="2615184"/>
-            <a:ext cx="786384" cy="786384"/>
+            <a:off x="3235056" y="2560320"/>
+            <a:ext cx="1188720" cy="1188720"/>
           </a:xfrm>
           <a:prstGeom prst="roundRect">
             <a:avLst>
@@ -13465,8 +13464,8 @@
         </p:nvSpPr>
         <p:spPr>
           <a:xfrm>
-            <a:off x="3439881" y="2615184"/>
-            <a:ext cx="786384" cy="786384"/>
+            <a:off x="3235056" y="2560320"/>
+            <a:ext cx="1188720" cy="1188720"/>
           </a:xfrm>
           <a:prstGeom prst="rect">
             <a:avLst/>
@@ -13482,7 +13481,7 @@
               <a:buNone/>
             </a:pPr>
             <a:r>
-              <a:rPr lang="en-US" sz="2200" b="1" dirty="0">
+              <a:rPr lang="en-US" sz="3000" b="1" dirty="0">
                 <a:solidFill>
                   <a:srgbClr val="FFFFFF"/>
                 </a:solidFill>
@@ -13492,7 +13491,7 @@
               </a:rPr>
               <a:t>NA</a:t>
             </a:r>
-            <a:endParaRPr lang="en-US" sz="2200" dirty="0"/>
+            <a:endParaRPr lang="en-US" sz="3000" dirty="0"/>
           </a:p>
         </p:txBody>
       </p:sp>
@@ -13504,8 +13503,8 @@
         </p:nvSpPr>
         <p:spPr>
           <a:xfrm>
-            <a:off x="3012582" y="3602736"/>
-            <a:ext cx="1640982" cy="512064"/>
+            <a:off x="2979664" y="3950208"/>
+            <a:ext cx="1699504" cy="310896"/>
           </a:xfrm>
           <a:prstGeom prst="rect">
             <a:avLst/>
@@ -13518,9 +13517,6 @@
           <a:lstStyle/>
           <a:p>
             <a:pPr algn="ctr" indent="0" marL="0">
-              <a:lnSpc>
-                <a:spcPct val="100000"/>
-              </a:lnSpc>
               <a:buNone/>
             </a:pPr>
             <a:r>
@@ -13546,17 +13542,17 @@
         </p:nvSpPr>
         <p:spPr>
           <a:xfrm>
-            <a:off x="2994294" y="4114800"/>
-            <a:ext cx="1677558" cy="420624"/>
-          </a:xfrm>
-          <a:prstGeom prst="rect">
-            <a:avLst/>
-          </a:prstGeom>
-          <a:noFill/>
-          <a:ln/>
-        </p:spPr>
-        <p:txBody>
-          <a:bodyPr wrap="square" lIns="0" tIns="0" rIns="0" bIns="0" rtlCol="0" anchor="ctr"/>
+            <a:off x="2961376" y="4315968"/>
+            <a:ext cx="1736080" cy="457200"/>
+          </a:xfrm>
+          <a:prstGeom prst="rect">
+            <a:avLst/>
+          </a:prstGeom>
+          <a:noFill/>
+          <a:ln/>
+        </p:spPr>
+        <p:txBody>
+          <a:bodyPr wrap="square" lIns="0" tIns="0" rIns="0" bIns="0" rtlCol="0" anchor="t"/>
           <a:lstStyle/>
           <a:p>
             <a:pPr algn="ctr" indent="0" marL="0">
@@ -13588,17 +13584,17 @@
         </p:nvSpPr>
         <p:spPr>
           <a:xfrm>
-            <a:off x="3030870" y="4590288"/>
-            <a:ext cx="1604406" cy="713232"/>
-          </a:xfrm>
-          <a:prstGeom prst="rect">
-            <a:avLst/>
-          </a:prstGeom>
-          <a:noFill/>
-          <a:ln/>
-        </p:spPr>
-        <p:txBody>
-          <a:bodyPr wrap="square" lIns="0" tIns="0" rIns="0" bIns="0" rtlCol="0" anchor="ctr"/>
+            <a:off x="2979664" y="4864608"/>
+            <a:ext cx="1699504" cy="841248"/>
+          </a:xfrm>
+          <a:prstGeom prst="rect">
+            <a:avLst/>
+          </a:prstGeom>
+          <a:noFill/>
+          <a:ln/>
+        </p:spPr>
+        <p:txBody>
+          <a:bodyPr wrap="square" lIns="0" tIns="0" rIns="0" bIns="0" rtlCol="0" anchor="t"/>
           <a:lstStyle/>
           <a:p>
             <a:pPr algn="ctr" indent="0" marL="0">
@@ -13630,12 +13626,12 @@
         </p:nvSpPr>
         <p:spPr>
           <a:xfrm>
-            <a:off x="5092476" y="2286000"/>
-            <a:ext cx="2006742" cy="3127248"/>
+            <a:off x="5099792" y="2231136"/>
+            <a:ext cx="1992112" cy="3639312"/>
           </a:xfrm>
           <a:prstGeom prst="roundRect">
             <a:avLst>
-              <a:gd name="adj" fmla="val 2734"/>
+              <a:gd name="adj" fmla="val 2754"/>
             </a:avLst>
           </a:prstGeom>
           <a:solidFill>
@@ -13659,8 +13655,8 @@
         </p:nvSpPr>
         <p:spPr>
           <a:xfrm>
-            <a:off x="5702656" y="2615184"/>
-            <a:ext cx="786384" cy="786384"/>
+            <a:off x="5501488" y="2560320"/>
+            <a:ext cx="1188720" cy="1188720"/>
           </a:xfrm>
           <a:prstGeom prst="roundRect">
             <a:avLst>
@@ -13681,8 +13677,8 @@
         </p:nvSpPr>
         <p:spPr>
           <a:xfrm>
-            <a:off x="5702656" y="2615184"/>
-            <a:ext cx="786384" cy="786384"/>
+            <a:off x="5501488" y="2560320"/>
+            <a:ext cx="1188720" cy="1188720"/>
           </a:xfrm>
           <a:prstGeom prst="rect">
             <a:avLst/>
@@ -13698,7 +13694,7 @@
               <a:buNone/>
             </a:pPr>
             <a:r>
-              <a:rPr lang="en-US" sz="2200" b="1" dirty="0">
+              <a:rPr lang="en-US" sz="3000" b="1" dirty="0">
                 <a:solidFill>
                   <a:srgbClr val="FFFFFF"/>
                 </a:solidFill>
@@ -13706,9 +13702,9 @@
                 <a:ea typeface="Times New Roman" pitchFamily="34" charset="-122"/>
                 <a:cs typeface="Times New Roman" pitchFamily="34" charset="-120"/>
               </a:rPr>
-              <a:t>VD</a:t>
-            </a:r>
-            <a:endParaRPr lang="en-US" sz="2200" dirty="0"/>
+              <a:t>NK</a:t>
+            </a:r>
+            <a:endParaRPr lang="en-US" sz="3000" dirty="0"/>
           </a:p>
         </p:txBody>
       </p:sp>
@@ -13720,8 +13716,8 @@
         </p:nvSpPr>
         <p:spPr>
           <a:xfrm>
-            <a:off x="5275356" y="3602736"/>
-            <a:ext cx="1640982" cy="512064"/>
+            <a:off x="5246096" y="3950208"/>
+            <a:ext cx="1699504" cy="310896"/>
           </a:xfrm>
           <a:prstGeom prst="rect">
             <a:avLst/>
@@ -13734,9 +13730,6 @@
           <a:lstStyle/>
           <a:p>
             <a:pPr algn="ctr" indent="0" marL="0">
-              <a:lnSpc>
-                <a:spcPct val="100000"/>
-              </a:lnSpc>
               <a:buNone/>
             </a:pPr>
             <a:r>
@@ -13748,7 +13741,7 @@
                 <a:ea typeface="Times New Roman" pitchFamily="34" charset="-122"/>
                 <a:cs typeface="Times New Roman" pitchFamily="34" charset="-120"/>
               </a:rPr>
-              <a:t>Vineeth Devadiga</a:t>
+              <a:t>Nilesh Kamble</a:t>
             </a:r>
             <a:endParaRPr lang="en-US" sz="1500" dirty="0"/>
           </a:p>
@@ -13762,17 +13755,17 @@
         </p:nvSpPr>
         <p:spPr>
           <a:xfrm>
-            <a:off x="5257068" y="4114800"/>
-            <a:ext cx="1677558" cy="420624"/>
-          </a:xfrm>
-          <a:prstGeom prst="rect">
-            <a:avLst/>
-          </a:prstGeom>
-          <a:noFill/>
-          <a:ln/>
-        </p:spPr>
-        <p:txBody>
-          <a:bodyPr wrap="square" lIns="0" tIns="0" rIns="0" bIns="0" rtlCol="0" anchor="ctr"/>
+            <a:off x="5227808" y="4315968"/>
+            <a:ext cx="1736080" cy="457200"/>
+          </a:xfrm>
+          <a:prstGeom prst="rect">
+            <a:avLst/>
+          </a:prstGeom>
+          <a:noFill/>
+          <a:ln/>
+        </p:spPr>
+        <p:txBody>
+          <a:bodyPr wrap="square" lIns="0" tIns="0" rIns="0" bIns="0" rtlCol="0" anchor="t"/>
           <a:lstStyle/>
           <a:p>
             <a:pPr algn="ctr" indent="0" marL="0">
@@ -13804,17 +13797,17 @@
         </p:nvSpPr>
         <p:spPr>
           <a:xfrm>
-            <a:off x="5293644" y="4590288"/>
-            <a:ext cx="1604406" cy="713232"/>
-          </a:xfrm>
-          <a:prstGeom prst="rect">
-            <a:avLst/>
-          </a:prstGeom>
-          <a:noFill/>
-          <a:ln/>
-        </p:spPr>
-        <p:txBody>
-          <a:bodyPr wrap="square" lIns="0" tIns="0" rIns="0" bIns="0" rtlCol="0" anchor="ctr"/>
+            <a:off x="5246096" y="4864608"/>
+            <a:ext cx="1699504" cy="841248"/>
+          </a:xfrm>
+          <a:prstGeom prst="rect">
+            <a:avLst/>
+          </a:prstGeom>
+          <a:noFill/>
+          <a:ln/>
+        </p:spPr>
+        <p:txBody>
+          <a:bodyPr wrap="square" lIns="0" tIns="0" rIns="0" bIns="0" rtlCol="0" anchor="t"/>
           <a:lstStyle/>
           <a:p>
             <a:pPr algn="ctr" indent="0" marL="0">
@@ -13846,12 +13839,12 @@
         </p:nvSpPr>
         <p:spPr>
           <a:xfrm>
-            <a:off x="7355251" y="2286000"/>
-            <a:ext cx="2006742" cy="3127248"/>
+            <a:off x="7366224" y="2231136"/>
+            <a:ext cx="1992112" cy="3639312"/>
           </a:xfrm>
           <a:prstGeom prst="roundRect">
             <a:avLst>
-              <a:gd name="adj" fmla="val 2734"/>
+              <a:gd name="adj" fmla="val 2754"/>
             </a:avLst>
           </a:prstGeom>
           <a:solidFill>
@@ -13875,8 +13868,8 @@
         </p:nvSpPr>
         <p:spPr>
           <a:xfrm>
-            <a:off x="7965430" y="2615184"/>
-            <a:ext cx="786384" cy="786384"/>
+            <a:off x="7767919" y="2560320"/>
+            <a:ext cx="1188720" cy="1188720"/>
           </a:xfrm>
           <a:prstGeom prst="roundRect">
             <a:avLst>
@@ -13897,8 +13890,8 @@
         </p:nvSpPr>
         <p:spPr>
           <a:xfrm>
-            <a:off x="7965430" y="2615184"/>
-            <a:ext cx="786384" cy="786384"/>
+            <a:off x="7767919" y="2560320"/>
+            <a:ext cx="1188720" cy="1188720"/>
           </a:xfrm>
           <a:prstGeom prst="rect">
             <a:avLst/>
@@ -13914,7 +13907,7 @@
               <a:buNone/>
             </a:pPr>
             <a:r>
-              <a:rPr lang="en-US" sz="2200" b="1" dirty="0">
+              <a:rPr lang="en-US" sz="3000" b="1" dirty="0">
                 <a:solidFill>
                   <a:srgbClr val="FFFFFF"/>
                 </a:solidFill>
@@ -13922,9 +13915,9 @@
                 <a:ea typeface="Times New Roman" pitchFamily="34" charset="-122"/>
                 <a:cs typeface="Times New Roman" pitchFamily="34" charset="-120"/>
               </a:rPr>
-              <a:t>AK</a:t>
-            </a:r>
-            <a:endParaRPr lang="en-US" sz="2200" dirty="0"/>
+              <a:t>SR</a:t>
+            </a:r>
+            <a:endParaRPr lang="en-US" sz="3000" dirty="0"/>
           </a:p>
         </p:txBody>
       </p:sp>
@@ -13936,8 +13929,8 @@
         </p:nvSpPr>
         <p:spPr>
           <a:xfrm>
-            <a:off x="7538131" y="3602736"/>
-            <a:ext cx="1640982" cy="512064"/>
+            <a:off x="7512528" y="3950208"/>
+            <a:ext cx="1699504" cy="310896"/>
           </a:xfrm>
           <a:prstGeom prst="rect">
             <a:avLst/>
@@ -13950,9 +13943,6 @@
           <a:lstStyle/>
           <a:p>
             <a:pPr algn="ctr" indent="0" marL="0">
-              <a:lnSpc>
-                <a:spcPct val="100000"/>
-              </a:lnSpc>
               <a:buNone/>
             </a:pPr>
             <a:r>
@@ -13964,7 +13954,7 @@
                 <a:ea typeface="Times New Roman" pitchFamily="34" charset="-122"/>
                 <a:cs typeface="Times New Roman" pitchFamily="34" charset="-120"/>
               </a:rPr>
-              <a:t>Atharva Kadam</a:t>
+              <a:t>Sumithra Raju</a:t>
             </a:r>
             <a:endParaRPr lang="en-US" sz="1500" dirty="0"/>
           </a:p>
@@ -13978,17 +13968,17 @@
         </p:nvSpPr>
         <p:spPr>
           <a:xfrm>
-            <a:off x="7519843" y="4114800"/>
-            <a:ext cx="1677558" cy="420624"/>
-          </a:xfrm>
-          <a:prstGeom prst="rect">
-            <a:avLst/>
-          </a:prstGeom>
-          <a:noFill/>
-          <a:ln/>
-        </p:spPr>
-        <p:txBody>
-          <a:bodyPr wrap="square" lIns="0" tIns="0" rIns="0" bIns="0" rtlCol="0" anchor="ctr"/>
+            <a:off x="7494240" y="4315968"/>
+            <a:ext cx="1736080" cy="457200"/>
+          </a:xfrm>
+          <a:prstGeom prst="rect">
+            <a:avLst/>
+          </a:prstGeom>
+          <a:noFill/>
+          <a:ln/>
+        </p:spPr>
+        <p:txBody>
+          <a:bodyPr wrap="square" lIns="0" tIns="0" rIns="0" bIns="0" rtlCol="0" anchor="t"/>
           <a:lstStyle/>
           <a:p>
             <a:pPr algn="ctr" indent="0" marL="0">
@@ -14020,17 +14010,17 @@
         </p:nvSpPr>
         <p:spPr>
           <a:xfrm>
-            <a:off x="7556419" y="4590288"/>
-            <a:ext cx="1604406" cy="713232"/>
-          </a:xfrm>
-          <a:prstGeom prst="rect">
-            <a:avLst/>
-          </a:prstGeom>
-          <a:noFill/>
-          <a:ln/>
-        </p:spPr>
-        <p:txBody>
-          <a:bodyPr wrap="square" lIns="0" tIns="0" rIns="0" bIns="0" rtlCol="0" anchor="ctr"/>
+            <a:off x="7512528" y="4864608"/>
+            <a:ext cx="1699504" cy="841248"/>
+          </a:xfrm>
+          <a:prstGeom prst="rect">
+            <a:avLst/>
+          </a:prstGeom>
+          <a:noFill/>
+          <a:ln/>
+        </p:spPr>
+        <p:txBody>
+          <a:bodyPr wrap="square" lIns="0" tIns="0" rIns="0" bIns="0" rtlCol="0" anchor="t"/>
           <a:lstStyle/>
           <a:p>
             <a:pPr algn="ctr" indent="0" marL="0">
@@ -14062,12 +14052,12 @@
         </p:nvSpPr>
         <p:spPr>
           <a:xfrm>
-            <a:off x="9618025" y="2286000"/>
-            <a:ext cx="2006742" cy="3127248"/>
+            <a:off x="9632655" y="2231136"/>
+            <a:ext cx="1992112" cy="3639312"/>
           </a:xfrm>
           <a:prstGeom prst="roundRect">
             <a:avLst>
-              <a:gd name="adj" fmla="val 2734"/>
+              <a:gd name="adj" fmla="val 2754"/>
             </a:avLst>
           </a:prstGeom>
           <a:solidFill>
@@ -14091,8 +14081,8 @@
         </p:nvSpPr>
         <p:spPr>
           <a:xfrm>
-            <a:off x="10228204" y="2615184"/>
-            <a:ext cx="786384" cy="786384"/>
+            <a:off x="10034351" y="2560320"/>
+            <a:ext cx="1188720" cy="1188720"/>
           </a:xfrm>
           <a:prstGeom prst="roundRect">
             <a:avLst>
@@ -14113,8 +14103,8 @@
         </p:nvSpPr>
         <p:spPr>
           <a:xfrm>
-            <a:off x="10228204" y="2615184"/>
-            <a:ext cx="786384" cy="786384"/>
+            <a:off x="10034351" y="2560320"/>
+            <a:ext cx="1188720" cy="1188720"/>
           </a:xfrm>
           <a:prstGeom prst="rect">
             <a:avLst/>
@@ -14130,7 +14120,7 @@
               <a:buNone/>
             </a:pPr>
             <a:r>
-              <a:rPr lang="en-US" sz="2200" b="1" dirty="0">
+              <a:rPr lang="en-US" sz="3000" b="1" dirty="0">
                 <a:solidFill>
                   <a:srgbClr val="FFFFFF"/>
                 </a:solidFill>
@@ -14138,9 +14128,9 @@
                 <a:ea typeface="Times New Roman" pitchFamily="34" charset="-122"/>
                 <a:cs typeface="Times New Roman" pitchFamily="34" charset="-120"/>
               </a:rPr>
-              <a:t>NK</a:t>
-            </a:r>
-            <a:endParaRPr lang="en-US" sz="2200" dirty="0"/>
+              <a:t>VD</a:t>
+            </a:r>
+            <a:endParaRPr lang="en-US" sz="3000" dirty="0"/>
           </a:p>
         </p:txBody>
       </p:sp>
@@ -14152,8 +14142,8 @@
         </p:nvSpPr>
         <p:spPr>
           <a:xfrm>
-            <a:off x="9800905" y="3602736"/>
-            <a:ext cx="1640982" cy="512064"/>
+            <a:off x="9778959" y="3950208"/>
+            <a:ext cx="1699504" cy="310896"/>
           </a:xfrm>
           <a:prstGeom prst="rect">
             <a:avLst/>
@@ -14166,9 +14156,6 @@
           <a:lstStyle/>
           <a:p>
             <a:pPr algn="ctr" indent="0" marL="0">
-              <a:lnSpc>
-                <a:spcPct val="100000"/>
-              </a:lnSpc>
               <a:buNone/>
             </a:pPr>
             <a:r>
@@ -14180,7 +14167,7 @@
                 <a:ea typeface="Times New Roman" pitchFamily="34" charset="-122"/>
                 <a:cs typeface="Times New Roman" pitchFamily="34" charset="-120"/>
               </a:rPr>
-              <a:t>Nilesh Kamble</a:t>
+              <a:t>Vineeth Devadiga</a:t>
             </a:r>
             <a:endParaRPr lang="en-US" sz="1500" dirty="0"/>
           </a:p>
@@ -14194,17 +14181,17 @@
         </p:nvSpPr>
         <p:spPr>
           <a:xfrm>
-            <a:off x="9782617" y="4114800"/>
-            <a:ext cx="1677558" cy="420624"/>
-          </a:xfrm>
-          <a:prstGeom prst="rect">
-            <a:avLst/>
-          </a:prstGeom>
-          <a:noFill/>
-          <a:ln/>
-        </p:spPr>
-        <p:txBody>
-          <a:bodyPr wrap="square" lIns="0" tIns="0" rIns="0" bIns="0" rtlCol="0" anchor="ctr"/>
+            <a:off x="9760671" y="4315968"/>
+            <a:ext cx="1736080" cy="457200"/>
+          </a:xfrm>
+          <a:prstGeom prst="rect">
+            <a:avLst/>
+          </a:prstGeom>
+          <a:noFill/>
+          <a:ln/>
+        </p:spPr>
+        <p:txBody>
+          <a:bodyPr wrap="square" lIns="0" tIns="0" rIns="0" bIns="0" rtlCol="0" anchor="t"/>
           <a:lstStyle/>
           <a:p>
             <a:pPr algn="ctr" indent="0" marL="0">
@@ -14236,17 +14223,17 @@
         </p:nvSpPr>
         <p:spPr>
           <a:xfrm>
-            <a:off x="9819193" y="4590288"/>
-            <a:ext cx="1604406" cy="713232"/>
-          </a:xfrm>
-          <a:prstGeom prst="rect">
-            <a:avLst/>
-          </a:prstGeom>
-          <a:noFill/>
-          <a:ln/>
-        </p:spPr>
-        <p:txBody>
-          <a:bodyPr wrap="square" lIns="0" tIns="0" rIns="0" bIns="0" rtlCol="0" anchor="ctr"/>
+            <a:off x="9778959" y="4864608"/>
+            <a:ext cx="1699504" cy="841248"/>
+          </a:xfrm>
+          <a:prstGeom prst="rect">
+            <a:avLst/>
+          </a:prstGeom>
+          <a:noFill/>
+          <a:ln/>
+        </p:spPr>
+        <p:txBody>
+          <a:bodyPr wrap="square" lIns="0" tIns="0" rIns="0" bIns="0" rtlCol="0" anchor="t"/>
           <a:lstStyle/>
           <a:p>
             <a:pPr algn="ctr" indent="0" marL="0">

--- a/docs/presentation/BIET-Denovo-10min.pptx
+++ b/docs/presentation/BIET-Denovo-10min.pptx
@@ -19,9 +19,10 @@
     <p:sldId id="267" r:id="rId13"/>
     <p:sldId id="268" r:id="rId14"/>
     <p:sldId id="269" r:id="rId15"/>
+    <p:sldId id="270" r:id="rId16"/>
   </p:sldIdLst>
   <p:notesMasterIdLst>
-    <p:notesMasterId r:id="rId16"/>
+    <p:notesMasterId r:id="rId17"/>
   </p:notesMasterIdLst>
   <p:sldSz cx="12192000" cy="6858000"/>
   <p:notesSz cx="6858000" cy="12192000"/>
@@ -962,9 +963,10 @@
           <a:p>
             <a:r>
               <a:rPr lang="en-US" dirty="0"/>
-              <a:t>Backup. Reach for this the moment someone asks what is missing, and answer without hedging.
-Every one of these is already written down in the repository's architecture document under known limitations. Being able to name your own gaps in a Q&amp;A is the difference between a demo and a project.
-Pair it with the roadmap slide: the first four limitations here are the first four things we would build.</a:t>
+              <a:t>Backup, and the one to reach for when someone asks whether the tool can be trusted outside its own demo.
+The claim is narrow and worth stating precisely: four published budget impact analyses, rebuilt as input workbooks, imported through the same code path a user drives, and reproduced to within two hundredths of a percent. Nothing is hard-coded; every figure is computed from the workbook's own inputs.
+The two exact matches are the strong ones. The ISPOR 2026 case is 0.015% low because our blended GLP-1 price sits a fraction under the poster's, and the PharmacoEconomics case is 0.007% high for the same kind of rounding reason. Say that rather than rounding both to zero.
+Volunteer the limit as well: these check the engine against each workbook's stated benchmark. They do not re-verify the papers themselves. If a judge wants to open the source and check, that is exactly the right thing to do and the workbook carries the DOI.</a:t>
             </a:r>
             <a:endParaRPr lang="en-US" dirty="0"/>
           </a:p>
@@ -988,6 +990,96 @@
             <a:fld id="{F7021451-1387-4CA6-816F-3879F97B5CBC}" type="slidenum">
               <a:rPr lang="en-US"/>
               <a:t>14</a:t>
+            </a:fld>
+            <a:endParaRPr lang="en-US"/>
+          </a:p>
+        </p:txBody>
+      </p:sp>
+    </p:spTree>
+    <p:extLst>
+      <p:ext uri="{BB962C8B-B14F-4D97-AF65-F5344CB8AC3E}">
+        <p14:creationId xmlns:p14="http://schemas.microsoft.com/office/powerpoint/2010/main" val="1024086991"/>
+      </p:ext>
+    </p:extLst>
+  </p:cSld>
+  <p:clrMapOvr>
+    <a:masterClrMapping/>
+  </p:clrMapOvr>
+</p:notes>
+</file>
+
+<file path=ppt/notesSlides/notesSlide15.xml><?xml version="1.0" encoding="utf-8"?>
+<p:notes xmlns:a="http://schemas.openxmlformats.org/drawingml/2006/main" xmlns:r="http://schemas.openxmlformats.org/officeDocument/2006/relationships" xmlns:p="http://schemas.openxmlformats.org/presentationml/2006/main">
+  <p:cSld>
+    <p:spTree>
+      <p:nvGrpSpPr>
+        <p:cNvPr id="1" name=""/>
+        <p:cNvGrpSpPr/>
+        <p:nvPr/>
+      </p:nvGrpSpPr>
+      <p:grpSpPr>
+        <a:xfrm>
+          <a:off x="0" y="0"/>
+          <a:ext cx="0" cy="0"/>
+          <a:chOff x="0" y="0"/>
+          <a:chExt cx="0" cy="0"/>
+        </a:xfrm>
+      </p:grpSpPr>
+      <p:sp>
+        <p:nvSpPr>
+          <p:cNvPr id="2" name="Slide Image Placeholder 1"/>
+          <p:cNvSpPr>
+            <a:spLocks noGrp="1" noRot="1" noChangeAspect="1"/>
+          </p:cNvSpPr>
+          <p:nvPr>
+            <p:ph type="sldImg"/>
+          </p:nvPr>
+        </p:nvSpPr>
+        <p:spPr/>
+      </p:sp>
+      <p:sp>
+        <p:nvSpPr>
+          <p:cNvPr id="3" name="Notes Placeholder 2"/>
+          <p:cNvSpPr>
+            <a:spLocks noGrp="1"/>
+          </p:cNvSpPr>
+          <p:nvPr>
+            <p:ph type="body" idx="1"/>
+          </p:nvPr>
+        </p:nvSpPr>
+        <p:spPr/>
+        <p:txBody>
+          <a:bodyPr/>
+          <a:lstStyle/>
+          <a:p>
+            <a:r>
+              <a:rPr lang="en-US" dirty="0"/>
+              <a:t>Backup. Reach for this the moment someone asks what is missing, and answer without hedging.
+Every one of these is already written down in the repository's architecture document under known limitations. Being able to name your own gaps in a Q&amp;A is the difference between a demo and a project.
+Pair it with the roadmap slide: the first four limitations here are the first four things we would build.</a:t>
+            </a:r>
+            <a:endParaRPr lang="en-US" dirty="0"/>
+          </a:p>
+        </p:txBody>
+      </p:sp>
+      <p:sp>
+        <p:nvSpPr>
+          <p:cNvPr id="4" name="Slide Number Placeholder 3"/>
+          <p:cNvSpPr>
+            <a:spLocks noGrp="1"/>
+          </p:cNvSpPr>
+          <p:nvPr>
+            <p:ph type="sldNum" sz="quarter" idx="10"/>
+          </p:nvPr>
+        </p:nvSpPr>
+        <p:spPr/>
+        <p:txBody>
+          <a:bodyPr/>
+          <a:lstStyle/>
+          <a:p>
+            <a:fld id="{F7021451-1387-4CA6-816F-3879F97B5CBC}" type="slidenum">
+              <a:rPr lang="en-US"/>
+              <a:t>15</a:t>
             </a:fld>
             <a:endParaRPr lang="en-US"/>
           </a:p>
@@ -4445,7 +4537,7 @@
                 <a:ea typeface="Times New Roman" pitchFamily="34" charset="-122"/>
                 <a:cs typeface="Times New Roman" pitchFamily="34" charset="-120"/>
               </a:rPr>
-              <a:t>38 unit tests run against the engine, plus browser checks against the built bundle and endpoint probes against a running server.</a:t>
+              <a:t>67 tests run against the engine and the importer, plus browser checks against the built bundle and endpoint probes against a running server.</a:t>
             </a:r>
             <a:endParaRPr lang="en-US" sz="1500" dirty="0"/>
           </a:p>
@@ -5599,7 +5691,7 @@
                 <a:ea typeface="Times New Roman" pitchFamily="34" charset="-122"/>
                 <a:cs typeface="Times New Roman" pitchFamily="34" charset="-120"/>
               </a:rPr>
-              <a:t>BACKUP · LIMITATIONS</a:t>
+              <a:t>BACKUP · LITERATURE VALIDATION</a:t>
             </a:r>
             <a:endParaRPr lang="en-US" sz="1200" dirty="0"/>
           </a:p>
@@ -5641,7 +5733,7 @@
                 <a:ea typeface="Times New Roman" pitchFamily="34" charset="-122"/>
                 <a:cs typeface="Times New Roman" pitchFamily="34" charset="-120"/>
               </a:rPr>
-              <a:t>What this is not</a:t>
+              <a:t>Checked against four published analyses</a:t>
             </a:r>
             <a:endParaRPr lang="en-US" sz="3200" dirty="0"/>
           </a:p>
@@ -5683,7 +5775,7 @@
                 <a:ea typeface="Times New Roman" pitchFamily="34" charset="-122"/>
                 <a:cs typeface="Times New Roman" pitchFamily="34" charset="-120"/>
               </a:rPr>
-              <a:t>An early-stage estimation tool, not a validated HTA submission model. Clinical, payer, epidemiological and price assumptions should be reviewed by HEOR specialists before any decision relies on them.</a:t>
+              <a:t>Each case is a published paper rebuilt as a workbook and imported through the same path a user drives, not a model assembled inside the test. No published figure is written into the engine.</a:t>
             </a:r>
             <a:endParaRPr lang="en-US" sz="1500" dirty="0"/>
           </a:p>
@@ -5691,18 +5783,213 @@
       </p:sp>
       <p:sp>
         <p:nvSpPr>
-          <p:cNvPr id="5" name="Shape 3"/>
+          <p:cNvPr id="5" name="Text 3"/>
+          <p:cNvSpPr txBox="1"/>
+          <p:nvPr/>
+        </p:nvSpPr>
+        <p:spPr>
+          <a:xfrm>
+            <a:off x="566928" y="1975104"/>
+            <a:ext cx="3145536" cy="237744"/>
+          </a:xfrm>
+          <a:prstGeom prst="rect">
+            <a:avLst/>
+          </a:prstGeom>
+          <a:noFill/>
+          <a:ln/>
+        </p:spPr>
+        <p:txBody>
+          <a:bodyPr wrap="square" lIns="0" tIns="0" rIns="0" bIns="0" rtlCol="0" anchor="ctr"/>
+          <a:lstStyle/>
+          <a:p>
+            <a:pPr algn="l" indent="0" marL="0">
+              <a:buNone/>
+            </a:pPr>
+            <a:r>
+              <a:rPr lang="en-US" sz="1000" b="1" spc="160" kern="0" dirty="0">
+                <a:solidFill>
+                  <a:srgbClr val="56597D"/>
+                </a:solidFill>
+                <a:latin typeface="Times New Roman" pitchFamily="34" charset="0"/>
+                <a:ea typeface="Times New Roman" pitchFamily="34" charset="-122"/>
+                <a:cs typeface="Times New Roman" pitchFamily="34" charset="-120"/>
+              </a:rPr>
+              <a:t>SOURCE</a:t>
+            </a:r>
+            <a:endParaRPr lang="en-US" sz="1000" dirty="0"/>
+          </a:p>
+        </p:txBody>
+      </p:sp>
+      <p:sp>
+        <p:nvSpPr>
+          <p:cNvPr id="6" name="Text 4"/>
+          <p:cNvSpPr txBox="1"/>
+          <p:nvPr/>
+        </p:nvSpPr>
+        <p:spPr>
+          <a:xfrm>
+            <a:off x="3785616" y="1975104"/>
+            <a:ext cx="2432304" cy="237744"/>
+          </a:xfrm>
+          <a:prstGeom prst="rect">
+            <a:avLst/>
+          </a:prstGeom>
+          <a:noFill/>
+          <a:ln/>
+        </p:spPr>
+        <p:txBody>
+          <a:bodyPr wrap="square" lIns="0" tIns="0" rIns="0" bIns="0" rtlCol="0" anchor="ctr"/>
+          <a:lstStyle/>
+          <a:p>
+            <a:pPr algn="l" indent="0" marL="0">
+              <a:buNone/>
+            </a:pPr>
+            <a:r>
+              <a:rPr lang="en-US" sz="1000" b="1" spc="160" kern="0" dirty="0">
+                <a:solidFill>
+                  <a:srgbClr val="56597D"/>
+                </a:solidFill>
+                <a:latin typeface="Times New Roman" pitchFamily="34" charset="0"/>
+                <a:ea typeface="Times New Roman" pitchFamily="34" charset="-122"/>
+                <a:cs typeface="Times New Roman" pitchFamily="34" charset="-120"/>
+              </a:rPr>
+              <a:t>BENCHMARK</a:t>
+            </a:r>
+            <a:endParaRPr lang="en-US" sz="1000" dirty="0"/>
+          </a:p>
+        </p:txBody>
+      </p:sp>
+      <p:sp>
+        <p:nvSpPr>
+          <p:cNvPr id="7" name="Text 5"/>
+          <p:cNvSpPr txBox="1"/>
+          <p:nvPr/>
+        </p:nvSpPr>
+        <p:spPr>
+          <a:xfrm>
+            <a:off x="6309360" y="1975104"/>
+            <a:ext cx="1975104" cy="237744"/>
+          </a:xfrm>
+          <a:prstGeom prst="rect">
+            <a:avLst/>
+          </a:prstGeom>
+          <a:noFill/>
+          <a:ln/>
+        </p:spPr>
+        <p:txBody>
+          <a:bodyPr wrap="square" lIns="0" tIns="0" rIns="0" bIns="0" rtlCol="0" anchor="ctr"/>
+          <a:lstStyle/>
+          <a:p>
+            <a:pPr algn="r" indent="0" marL="0">
+              <a:buNone/>
+            </a:pPr>
+            <a:r>
+              <a:rPr lang="en-US" sz="1000" b="1" spc="160" kern="0" dirty="0">
+                <a:solidFill>
+                  <a:srgbClr val="56597D"/>
+                </a:solidFill>
+                <a:latin typeface="Times New Roman" pitchFamily="34" charset="0"/>
+                <a:ea typeface="Times New Roman" pitchFamily="34" charset="-122"/>
+                <a:cs typeface="Times New Roman" pitchFamily="34" charset="-120"/>
+              </a:rPr>
+              <a:t>PUBLISHED</a:t>
+            </a:r>
+            <a:endParaRPr lang="en-US" sz="1000" dirty="0"/>
+          </a:p>
+        </p:txBody>
+      </p:sp>
+      <p:sp>
+        <p:nvSpPr>
+          <p:cNvPr id="8" name="Text 6"/>
+          <p:cNvSpPr txBox="1"/>
+          <p:nvPr/>
+        </p:nvSpPr>
+        <p:spPr>
+          <a:xfrm>
+            <a:off x="8375904" y="1975104"/>
+            <a:ext cx="1975104" cy="237744"/>
+          </a:xfrm>
+          <a:prstGeom prst="rect">
+            <a:avLst/>
+          </a:prstGeom>
+          <a:noFill/>
+          <a:ln/>
+        </p:spPr>
+        <p:txBody>
+          <a:bodyPr wrap="square" lIns="0" tIns="0" rIns="0" bIns="0" rtlCol="0" anchor="ctr"/>
+          <a:lstStyle/>
+          <a:p>
+            <a:pPr algn="r" indent="0" marL="0">
+              <a:buNone/>
+            </a:pPr>
+            <a:r>
+              <a:rPr lang="en-US" sz="1000" b="1" spc="160" kern="0" dirty="0">
+                <a:solidFill>
+                  <a:srgbClr val="56597D"/>
+                </a:solidFill>
+                <a:latin typeface="Times New Roman" pitchFamily="34" charset="0"/>
+                <a:ea typeface="Times New Roman" pitchFamily="34" charset="-122"/>
+                <a:cs typeface="Times New Roman" pitchFamily="34" charset="-120"/>
+              </a:rPr>
+              <a:t>BIET</a:t>
+            </a:r>
+            <a:endParaRPr lang="en-US" sz="1000" dirty="0"/>
+          </a:p>
+        </p:txBody>
+      </p:sp>
+      <p:sp>
+        <p:nvSpPr>
+          <p:cNvPr id="9" name="Text 7"/>
+          <p:cNvSpPr txBox="1"/>
+          <p:nvPr/>
+        </p:nvSpPr>
+        <p:spPr>
+          <a:xfrm>
+            <a:off x="10424160" y="1975104"/>
+            <a:ext cx="1197864" cy="237744"/>
+          </a:xfrm>
+          <a:prstGeom prst="rect">
+            <a:avLst/>
+          </a:prstGeom>
+          <a:noFill/>
+          <a:ln/>
+        </p:spPr>
+        <p:txBody>
+          <a:bodyPr wrap="square" lIns="0" tIns="0" rIns="0" bIns="0" rtlCol="0" anchor="ctr"/>
+          <a:lstStyle/>
+          <a:p>
+            <a:pPr algn="r" indent="0" marL="0">
+              <a:buNone/>
+            </a:pPr>
+            <a:r>
+              <a:rPr lang="en-US" sz="1000" b="1" spc="160" kern="0" dirty="0">
+                <a:solidFill>
+                  <a:srgbClr val="56597D"/>
+                </a:solidFill>
+                <a:latin typeface="Times New Roman" pitchFamily="34" charset="0"/>
+                <a:ea typeface="Times New Roman" pitchFamily="34" charset="-122"/>
+                <a:cs typeface="Times New Roman" pitchFamily="34" charset="-120"/>
+              </a:rPr>
+              <a:t>DEVIATION</a:t>
+            </a:r>
+            <a:endParaRPr lang="en-US" sz="1000" dirty="0"/>
+          </a:p>
+        </p:txBody>
+      </p:sp>
+      <p:sp>
+        <p:nvSpPr>
+          <p:cNvPr id="10" name="Shape 8"/>
           <p:cNvSpPr/>
           <p:nvPr/>
         </p:nvSpPr>
         <p:spPr>
           <a:xfrm>
-            <a:off x="566928" y="2121408"/>
-            <a:ext cx="3466490" cy="1554480"/>
+            <a:off x="438912" y="2322576"/>
+            <a:ext cx="11313871" cy="768096"/>
           </a:xfrm>
           <a:prstGeom prst="roundRect">
             <a:avLst>
-              <a:gd name="adj" fmla="val 3529"/>
+              <a:gd name="adj" fmla="val 7143"/>
             </a:avLst>
           </a:prstGeom>
           <a:solidFill>
@@ -5720,30 +6007,30 @@
       </p:sp>
       <p:sp>
         <p:nvSpPr>
-          <p:cNvPr id="6" name="Text 4"/>
-          <p:cNvSpPr txBox="1"/>
-          <p:nvPr/>
-        </p:nvSpPr>
-        <p:spPr>
-          <a:xfrm>
-            <a:off x="859536" y="2377440"/>
-            <a:ext cx="2881274" cy="310896"/>
-          </a:xfrm>
-          <a:prstGeom prst="rect">
-            <a:avLst/>
-          </a:prstGeom>
-          <a:noFill/>
-          <a:ln/>
-        </p:spPr>
-        <p:txBody>
-          <a:bodyPr wrap="square" lIns="0" tIns="0" rIns="0" bIns="0" rtlCol="0" anchor="ctr"/>
-          <a:lstStyle/>
-          <a:p>
-            <a:pPr indent="0" marL="0">
-              <a:buNone/>
-            </a:pPr>
-            <a:r>
-              <a:rPr lang="en-US" sz="1500" b="1" dirty="0">
+          <p:cNvPr id="11" name="Text 9"/>
+          <p:cNvSpPr txBox="1"/>
+          <p:nvPr/>
+        </p:nvSpPr>
+        <p:spPr>
+          <a:xfrm>
+            <a:off x="566928" y="2441448"/>
+            <a:ext cx="3145536" cy="237744"/>
+          </a:xfrm>
+          <a:prstGeom prst="rect">
+            <a:avLst/>
+          </a:prstGeom>
+          <a:noFill/>
+          <a:ln/>
+        </p:spPr>
+        <p:txBody>
+          <a:bodyPr wrap="square" lIns="0" tIns="0" rIns="0" bIns="0" rtlCol="0" anchor="ctr"/>
+          <a:lstStyle/>
+          <a:p>
+            <a:pPr indent="0" marL="0">
+              <a:buNone/>
+            </a:pPr>
+            <a:r>
+              <a:rPr lang="en-US" sz="1300" b="1" dirty="0">
                 <a:solidFill>
                   <a:srgbClr val="16173A"/>
                 </a:solidFill>
@@ -5751,49 +6038,124 @@
                 <a:ea typeface="Times New Roman" pitchFamily="34" charset="-122"/>
                 <a:cs typeface="Times New Roman" pitchFamily="34" charset="-120"/>
               </a:rPr>
-              <a:t>Single country</a:t>
-            </a:r>
-            <a:endParaRPr lang="en-US" sz="1500" dirty="0"/>
-          </a:p>
-        </p:txBody>
-      </p:sp>
-      <p:sp>
-        <p:nvSpPr>
-          <p:cNvPr id="7" name="Text 5"/>
-          <p:cNvSpPr txBox="1"/>
-          <p:nvPr/>
-        </p:nvSpPr>
-        <p:spPr>
-          <a:xfrm>
-            <a:off x="859536" y="2743200"/>
-            <a:ext cx="2881274" cy="768096"/>
-          </a:xfrm>
-          <a:prstGeom prst="rect">
-            <a:avLst/>
-          </a:prstGeom>
-          <a:noFill/>
-          <a:ln/>
-        </p:spPr>
-        <p:txBody>
-          <a:bodyPr wrap="square" lIns="0" tIns="0" rIns="0" bIns="0" rtlCol="0" anchor="ctr"/>
-          <a:lstStyle/>
-          <a:p>
-            <a:pPr indent="0" marL="0">
-              <a:lnSpc>
-                <a:spcPct val="108000"/>
-              </a:lnSpc>
+              <a:t>ISPOR Europe 2025</a:t>
+            </a:r>
+            <a:endParaRPr lang="en-US" sz="1300" dirty="0"/>
+          </a:p>
+        </p:txBody>
+      </p:sp>
+      <p:sp>
+        <p:nvSpPr>
+          <p:cNvPr id="12" name="Text 10"/>
+          <p:cNvSpPr txBox="1"/>
+          <p:nvPr/>
+        </p:nvSpPr>
+        <p:spPr>
+          <a:xfrm>
+            <a:off x="566928" y="2697480"/>
+            <a:ext cx="3145536" cy="274320"/>
+          </a:xfrm>
+          <a:prstGeom prst="rect">
+            <a:avLst/>
+          </a:prstGeom>
+          <a:noFill/>
+          <a:ln/>
+        </p:spPr>
+        <p:txBody>
+          <a:bodyPr wrap="square" lIns="0" tIns="0" rIns="0" bIns="0" rtlCol="0" anchor="ctr"/>
+          <a:lstStyle/>
+          <a:p>
+            <a:pPr indent="0" marL="0">
+              <a:buNone/>
+            </a:pPr>
+            <a:r>
+              <a:rPr lang="en-US" sz="1150" dirty="0">
+                <a:solidFill>
+                  <a:srgbClr val="56597D"/>
+                </a:solidFill>
+                <a:latin typeface="Times New Roman" pitchFamily="34" charset="0"/>
+                <a:ea typeface="Times New Roman" pitchFamily="34" charset="-122"/>
+                <a:cs typeface="Times New Roman" pitchFamily="34" charset="-120"/>
+              </a:rPr>
+              <a:t>GLP-1 RAs in type 2 diabetes, India</a:t>
+            </a:r>
+            <a:endParaRPr lang="en-US" sz="1150" dirty="0"/>
+          </a:p>
+        </p:txBody>
+      </p:sp>
+      <p:sp>
+        <p:nvSpPr>
+          <p:cNvPr id="13" name="Text 11"/>
+          <p:cNvSpPr txBox="1"/>
+          <p:nvPr/>
+        </p:nvSpPr>
+        <p:spPr>
+          <a:xfrm>
+            <a:off x="3785616" y="2569464"/>
+            <a:ext cx="2432304" cy="274320"/>
+          </a:xfrm>
+          <a:prstGeom prst="rect">
+            <a:avLst/>
+          </a:prstGeom>
+          <a:noFill/>
+          <a:ln/>
+        </p:spPr>
+        <p:txBody>
+          <a:bodyPr wrap="square" lIns="0" tIns="0" rIns="0" bIns="0" rtlCol="0" anchor="ctr"/>
+          <a:lstStyle/>
+          <a:p>
+            <a:pPr indent="0" marL="0">
+              <a:buNone/>
+            </a:pPr>
+            <a:r>
+              <a:rPr lang="en-US" sz="1200" dirty="0">
+                <a:solidFill>
+                  <a:srgbClr val="34365A"/>
+                </a:solidFill>
+                <a:latin typeface="Times New Roman" pitchFamily="34" charset="0"/>
+                <a:ea typeface="Times New Roman" pitchFamily="34" charset="-122"/>
+                <a:cs typeface="Times New Roman" pitchFamily="34" charset="-120"/>
+              </a:rPr>
+              <a:t>Semaglutide, 5 years</a:t>
+            </a:r>
+            <a:endParaRPr lang="en-US" sz="1200" dirty="0"/>
+          </a:p>
+        </p:txBody>
+      </p:sp>
+      <p:sp>
+        <p:nvSpPr>
+          <p:cNvPr id="14" name="Text 12"/>
+          <p:cNvSpPr txBox="1"/>
+          <p:nvPr/>
+        </p:nvSpPr>
+        <p:spPr>
+          <a:xfrm>
+            <a:off x="6309360" y="2569464"/>
+            <a:ext cx="1975104" cy="274320"/>
+          </a:xfrm>
+          <a:prstGeom prst="rect">
+            <a:avLst/>
+          </a:prstGeom>
+          <a:noFill/>
+          <a:ln/>
+        </p:spPr>
+        <p:txBody>
+          <a:bodyPr wrap="square" lIns="0" tIns="0" rIns="0" bIns="0" rtlCol="0" anchor="ctr"/>
+          <a:lstStyle/>
+          <a:p>
+            <a:pPr algn="r" indent="0" marL="0">
               <a:buNone/>
             </a:pPr>
             <a:r>
               <a:rPr lang="en-US" sz="1250" dirty="0">
                 <a:solidFill>
-                  <a:srgbClr val="56597D"/>
-                </a:solidFill>
-                <a:latin typeface="Times New Roman" pitchFamily="34" charset="0"/>
-                <a:ea typeface="Times New Roman" pitchFamily="34" charset="-122"/>
-                <a:cs typeface="Times New Roman" pitchFamily="34" charset="-120"/>
-              </a:rPr>
-              <a:t>One market, one currency and one price set per run. Multi-country aggregation is not implemented.</a:t>
+                  <a:srgbClr val="34365A"/>
+                </a:solidFill>
+                <a:latin typeface="Times New Roman" pitchFamily="34" charset="0"/>
+                <a:ea typeface="Times New Roman" pitchFamily="34" charset="-122"/>
+                <a:cs typeface="Times New Roman" pitchFamily="34" charset="-120"/>
+              </a:rPr>
+              <a:t>₹3,447,884,379</a:t>
             </a:r>
             <a:endParaRPr lang="en-US" sz="1250" dirty="0"/>
           </a:p>
@@ -5801,18 +6163,96 @@
       </p:sp>
       <p:sp>
         <p:nvSpPr>
-          <p:cNvPr id="8" name="Shape 6"/>
+          <p:cNvPr id="15" name="Text 13"/>
+          <p:cNvSpPr txBox="1"/>
+          <p:nvPr/>
+        </p:nvSpPr>
+        <p:spPr>
+          <a:xfrm>
+            <a:off x="8375904" y="2569464"/>
+            <a:ext cx="1975104" cy="274320"/>
+          </a:xfrm>
+          <a:prstGeom prst="rect">
+            <a:avLst/>
+          </a:prstGeom>
+          <a:noFill/>
+          <a:ln/>
+        </p:spPr>
+        <p:txBody>
+          <a:bodyPr wrap="square" lIns="0" tIns="0" rIns="0" bIns="0" rtlCol="0" anchor="ctr"/>
+          <a:lstStyle/>
+          <a:p>
+            <a:pPr algn="r" indent="0" marL="0">
+              <a:buNone/>
+            </a:pPr>
+            <a:r>
+              <a:rPr lang="en-US" sz="1250" b="1" dirty="0">
+                <a:solidFill>
+                  <a:srgbClr val="16173A"/>
+                </a:solidFill>
+                <a:latin typeface="Times New Roman" pitchFamily="34" charset="0"/>
+                <a:ea typeface="Times New Roman" pitchFamily="34" charset="-122"/>
+                <a:cs typeface="Times New Roman" pitchFamily="34" charset="-120"/>
+              </a:rPr>
+              <a:t>₹3,447,884,379</a:t>
+            </a:r>
+            <a:endParaRPr lang="en-US" sz="1250" dirty="0"/>
+          </a:p>
+        </p:txBody>
+      </p:sp>
+      <p:sp>
+        <p:nvSpPr>
+          <p:cNvPr id="16" name="Text 14"/>
+          <p:cNvSpPr txBox="1"/>
+          <p:nvPr/>
+        </p:nvSpPr>
+        <p:spPr>
+          <a:xfrm>
+            <a:off x="10424160" y="2569464"/>
+            <a:ext cx="1197864" cy="274320"/>
+          </a:xfrm>
+          <a:prstGeom prst="rect">
+            <a:avLst/>
+          </a:prstGeom>
+          <a:noFill/>
+          <a:ln/>
+        </p:spPr>
+        <p:txBody>
+          <a:bodyPr wrap="square" lIns="0" tIns="0" rIns="0" bIns="0" rtlCol="0" anchor="ctr"/>
+          <a:lstStyle/>
+          <a:p>
+            <a:pPr algn="r" indent="0" marL="0">
+              <a:buNone/>
+            </a:pPr>
+            <a:r>
+              <a:rPr lang="en-US" sz="1250" b="1" dirty="0">
+                <a:solidFill>
+                  <a:srgbClr val="5B3BD4"/>
+                </a:solidFill>
+                <a:latin typeface="Times New Roman" pitchFamily="34" charset="0"/>
+                <a:ea typeface="Times New Roman" pitchFamily="34" charset="-122"/>
+                <a:cs typeface="Times New Roman" pitchFamily="34" charset="-120"/>
+              </a:rPr>
+              <a:t>0.00%</a:t>
+            </a:r>
+            <a:endParaRPr lang="en-US" sz="1250" dirty="0"/>
+          </a:p>
+        </p:txBody>
+      </p:sp>
+      <p:sp>
+        <p:nvSpPr>
+          <p:cNvPr id="17" name="Shape 15"/>
           <p:cNvSpPr/>
           <p:nvPr/>
         </p:nvSpPr>
         <p:spPr>
           <a:xfrm>
-            <a:off x="4362602" y="2121408"/>
-            <a:ext cx="3466490" cy="1554480"/>
+            <a:off x="438912" y="3182112"/>
+            <a:ext cx="11313871" cy="768096"/>
           </a:xfrm>
           <a:prstGeom prst="roundRect">
             <a:avLst>
-              <a:gd name="adj" fmla="val 3529"/>
+              <a:gd name="adj" fmla="val 7143"/>
             </a:avLst>
           </a:prstGeom>
           <a:solidFill>
@@ -5830,30 +6270,30 @@
       </p:sp>
       <p:sp>
         <p:nvSpPr>
-          <p:cNvPr id="9" name="Text 7"/>
-          <p:cNvSpPr txBox="1"/>
-          <p:nvPr/>
-        </p:nvSpPr>
-        <p:spPr>
-          <a:xfrm>
-            <a:off x="4655210" y="2377440"/>
-            <a:ext cx="2881274" cy="310896"/>
-          </a:xfrm>
-          <a:prstGeom prst="rect">
-            <a:avLst/>
-          </a:prstGeom>
-          <a:noFill/>
-          <a:ln/>
-        </p:spPr>
-        <p:txBody>
-          <a:bodyPr wrap="square" lIns="0" tIns="0" rIns="0" bIns="0" rtlCol="0" anchor="ctr"/>
-          <a:lstStyle/>
-          <a:p>
-            <a:pPr indent="0" marL="0">
-              <a:buNone/>
-            </a:pPr>
-            <a:r>
-              <a:rPr lang="en-US" sz="1500" b="1" dirty="0">
+          <p:cNvPr id="18" name="Text 16"/>
+          <p:cNvSpPr txBox="1"/>
+          <p:nvPr/>
+        </p:nvSpPr>
+        <p:spPr>
+          <a:xfrm>
+            <a:off x="566928" y="3300984"/>
+            <a:ext cx="3145536" cy="237744"/>
+          </a:xfrm>
+          <a:prstGeom prst="rect">
+            <a:avLst/>
+          </a:prstGeom>
+          <a:noFill/>
+          <a:ln/>
+        </p:spPr>
+        <p:txBody>
+          <a:bodyPr wrap="square" lIns="0" tIns="0" rIns="0" bIns="0" rtlCol="0" anchor="ctr"/>
+          <a:lstStyle/>
+          <a:p>
+            <a:pPr indent="0" marL="0">
+              <a:buNone/>
+            </a:pPr>
+            <a:r>
+              <a:rPr lang="en-US" sz="1300" b="1" dirty="0">
                 <a:solidFill>
                   <a:srgbClr val="16173A"/>
                 </a:solidFill>
@@ -5861,49 +6301,124 @@
                 <a:ea typeface="Times New Roman" pitchFamily="34" charset="-122"/>
                 <a:cs typeface="Times New Roman" pitchFamily="34" charset="-120"/>
               </a:rPr>
-              <a:t>Subgroups are partial</a:t>
-            </a:r>
-            <a:endParaRPr lang="en-US" sz="1500" dirty="0"/>
-          </a:p>
-        </p:txBody>
-      </p:sp>
-      <p:sp>
-        <p:nvSpPr>
-          <p:cNvPr id="10" name="Text 8"/>
-          <p:cNvSpPr txBox="1"/>
-          <p:nvPr/>
-        </p:nvSpPr>
-        <p:spPr>
-          <a:xfrm>
-            <a:off x="4655210" y="2743200"/>
-            <a:ext cx="2881274" cy="768096"/>
-          </a:xfrm>
-          <a:prstGeom prst="rect">
-            <a:avLst/>
-          </a:prstGeom>
-          <a:noFill/>
-          <a:ln/>
-        </p:spPr>
-        <p:txBody>
-          <a:bodyPr wrap="square" lIns="0" tIns="0" rIns="0" bIns="0" rtlCol="0" anchor="ctr"/>
-          <a:lstStyle/>
-          <a:p>
-            <a:pPr indent="0" marL="0">
-              <a:lnSpc>
-                <a:spcPct val="108000"/>
-              </a:lnSpc>
+              <a:t>JAMA Health Forum 2025</a:t>
+            </a:r>
+            <a:endParaRPr lang="en-US" sz="1300" dirty="0"/>
+          </a:p>
+        </p:txBody>
+      </p:sp>
+      <p:sp>
+        <p:nvSpPr>
+          <p:cNvPr id="19" name="Text 17"/>
+          <p:cNvSpPr txBox="1"/>
+          <p:nvPr/>
+        </p:nvSpPr>
+        <p:spPr>
+          <a:xfrm>
+            <a:off x="566928" y="3557016"/>
+            <a:ext cx="3145536" cy="274320"/>
+          </a:xfrm>
+          <a:prstGeom prst="rect">
+            <a:avLst/>
+          </a:prstGeom>
+          <a:noFill/>
+          <a:ln/>
+        </p:spPr>
+        <p:txBody>
+          <a:bodyPr wrap="square" lIns="0" tIns="0" rIns="0" bIns="0" rtlCol="0" anchor="ctr"/>
+          <a:lstStyle/>
+          <a:p>
+            <a:pPr indent="0" marL="0">
+              <a:buNone/>
+            </a:pPr>
+            <a:r>
+              <a:rPr lang="en-US" sz="1150" dirty="0">
+                <a:solidFill>
+                  <a:srgbClr val="56597D"/>
+                </a:solidFill>
+                <a:latin typeface="Times New Roman" pitchFamily="34" charset="0"/>
+                <a:ea typeface="Times New Roman" pitchFamily="34" charset="-122"/>
+                <a:cs typeface="Times New Roman" pitchFamily="34" charset="-120"/>
+              </a:rPr>
+              <a:t>Medicare GLP-1 coverage, US</a:t>
+            </a:r>
+            <a:endParaRPr lang="en-US" sz="1150" dirty="0"/>
+          </a:p>
+        </p:txBody>
+      </p:sp>
+      <p:sp>
+        <p:nvSpPr>
+          <p:cNvPr id="20" name="Text 18"/>
+          <p:cNvSpPr txBox="1"/>
+          <p:nvPr/>
+        </p:nvSpPr>
+        <p:spPr>
+          <a:xfrm>
+            <a:off x="3785616" y="3429000"/>
+            <a:ext cx="2432304" cy="274320"/>
+          </a:xfrm>
+          <a:prstGeom prst="rect">
+            <a:avLst/>
+          </a:prstGeom>
+          <a:noFill/>
+          <a:ln/>
+        </p:spPr>
+        <p:txBody>
+          <a:bodyPr wrap="square" lIns="0" tIns="0" rIns="0" bIns="0" rtlCol="0" anchor="ctr"/>
+          <a:lstStyle/>
+          <a:p>
+            <a:pPr indent="0" marL="0">
+              <a:buNone/>
+            </a:pPr>
+            <a:r>
+              <a:rPr lang="en-US" sz="1200" dirty="0">
+                <a:solidFill>
+                  <a:srgbClr val="34365A"/>
+                </a:solidFill>
+                <a:latin typeface="Times New Roman" pitchFamily="34" charset="0"/>
+                <a:ea typeface="Times New Roman" pitchFamily="34" charset="-122"/>
+                <a:cs typeface="Times New Roman" pitchFamily="34" charset="-120"/>
+              </a:rPr>
+              <a:t>Medication budget, 5 years</a:t>
+            </a:r>
+            <a:endParaRPr lang="en-US" sz="1200" dirty="0"/>
+          </a:p>
+        </p:txBody>
+      </p:sp>
+      <p:sp>
+        <p:nvSpPr>
+          <p:cNvPr id="21" name="Text 19"/>
+          <p:cNvSpPr txBox="1"/>
+          <p:nvPr/>
+        </p:nvSpPr>
+        <p:spPr>
+          <a:xfrm>
+            <a:off x="6309360" y="3429000"/>
+            <a:ext cx="1975104" cy="274320"/>
+          </a:xfrm>
+          <a:prstGeom prst="rect">
+            <a:avLst/>
+          </a:prstGeom>
+          <a:noFill/>
+          <a:ln/>
+        </p:spPr>
+        <p:txBody>
+          <a:bodyPr wrap="square" lIns="0" tIns="0" rIns="0" bIns="0" rtlCol="0" anchor="ctr"/>
+          <a:lstStyle/>
+          <a:p>
+            <a:pPr algn="r" indent="0" marL="0">
               <a:buNone/>
             </a:pPr>
             <a:r>
               <a:rPr lang="en-US" sz="1250" dirty="0">
                 <a:solidFill>
-                  <a:srgbClr val="56597D"/>
-                </a:solidFill>
-                <a:latin typeface="Times New Roman" pitchFamily="34" charset="0"/>
-                <a:ea typeface="Times New Roman" pitchFamily="34" charset="-122"/>
-                <a:cs typeface="Times New Roman" pitchFamily="34" charset="-120"/>
-              </a:rPr>
-              <a:t>Selecting a subgroup narrows the population but inherits the parent's cost and outcome parameters.</a:t>
+                  <a:srgbClr val="34365A"/>
+                </a:solidFill>
+                <a:latin typeface="Times New Roman" pitchFamily="34" charset="0"/>
+                <a:ea typeface="Times New Roman" pitchFamily="34" charset="-122"/>
+                <a:cs typeface="Times New Roman" pitchFamily="34" charset="-120"/>
+              </a:rPr>
+              <a:t>$32.0B</a:t>
             </a:r>
             <a:endParaRPr lang="en-US" sz="1250" dirty="0"/>
           </a:p>
@@ -5911,18 +6426,96 @@
       </p:sp>
       <p:sp>
         <p:nvSpPr>
-          <p:cNvPr id="11" name="Shape 9"/>
+          <p:cNvPr id="22" name="Text 20"/>
+          <p:cNvSpPr txBox="1"/>
+          <p:nvPr/>
+        </p:nvSpPr>
+        <p:spPr>
+          <a:xfrm>
+            <a:off x="8375904" y="3429000"/>
+            <a:ext cx="1975104" cy="274320"/>
+          </a:xfrm>
+          <a:prstGeom prst="rect">
+            <a:avLst/>
+          </a:prstGeom>
+          <a:noFill/>
+          <a:ln/>
+        </p:spPr>
+        <p:txBody>
+          <a:bodyPr wrap="square" lIns="0" tIns="0" rIns="0" bIns="0" rtlCol="0" anchor="ctr"/>
+          <a:lstStyle/>
+          <a:p>
+            <a:pPr algn="r" indent="0" marL="0">
+              <a:buNone/>
+            </a:pPr>
+            <a:r>
+              <a:rPr lang="en-US" sz="1250" b="1" dirty="0">
+                <a:solidFill>
+                  <a:srgbClr val="16173A"/>
+                </a:solidFill>
+                <a:latin typeface="Times New Roman" pitchFamily="34" charset="0"/>
+                <a:ea typeface="Times New Roman" pitchFamily="34" charset="-122"/>
+                <a:cs typeface="Times New Roman" pitchFamily="34" charset="-120"/>
+              </a:rPr>
+              <a:t>$32.0B</a:t>
+            </a:r>
+            <a:endParaRPr lang="en-US" sz="1250" dirty="0"/>
+          </a:p>
+        </p:txBody>
+      </p:sp>
+      <p:sp>
+        <p:nvSpPr>
+          <p:cNvPr id="23" name="Text 21"/>
+          <p:cNvSpPr txBox="1"/>
+          <p:nvPr/>
+        </p:nvSpPr>
+        <p:spPr>
+          <a:xfrm>
+            <a:off x="10424160" y="3429000"/>
+            <a:ext cx="1197864" cy="274320"/>
+          </a:xfrm>
+          <a:prstGeom prst="rect">
+            <a:avLst/>
+          </a:prstGeom>
+          <a:noFill/>
+          <a:ln/>
+        </p:spPr>
+        <p:txBody>
+          <a:bodyPr wrap="square" lIns="0" tIns="0" rIns="0" bIns="0" rtlCol="0" anchor="ctr"/>
+          <a:lstStyle/>
+          <a:p>
+            <a:pPr algn="r" indent="0" marL="0">
+              <a:buNone/>
+            </a:pPr>
+            <a:r>
+              <a:rPr lang="en-US" sz="1250" b="1" dirty="0">
+                <a:solidFill>
+                  <a:srgbClr val="5B3BD4"/>
+                </a:solidFill>
+                <a:latin typeface="Times New Roman" pitchFamily="34" charset="0"/>
+                <a:ea typeface="Times New Roman" pitchFamily="34" charset="-122"/>
+                <a:cs typeface="Times New Roman" pitchFamily="34" charset="-120"/>
+              </a:rPr>
+              <a:t>0.00%</a:t>
+            </a:r>
+            <a:endParaRPr lang="en-US" sz="1250" dirty="0"/>
+          </a:p>
+        </p:txBody>
+      </p:sp>
+      <p:sp>
+        <p:nvSpPr>
+          <p:cNvPr id="24" name="Shape 22"/>
           <p:cNvSpPr/>
           <p:nvPr/>
         </p:nvSpPr>
         <p:spPr>
           <a:xfrm>
-            <a:off x="8158277" y="2121408"/>
-            <a:ext cx="3466490" cy="1554480"/>
+            <a:off x="438912" y="4041648"/>
+            <a:ext cx="11313871" cy="768096"/>
           </a:xfrm>
           <a:prstGeom prst="roundRect">
             <a:avLst>
-              <a:gd name="adj" fmla="val 3529"/>
+              <a:gd name="adj" fmla="val 7143"/>
             </a:avLst>
           </a:prstGeom>
           <a:solidFill>
@@ -5940,30 +6533,30 @@
       </p:sp>
       <p:sp>
         <p:nvSpPr>
-          <p:cNvPr id="12" name="Text 10"/>
-          <p:cNvSpPr txBox="1"/>
-          <p:nvPr/>
-        </p:nvSpPr>
-        <p:spPr>
-          <a:xfrm>
-            <a:off x="8450885" y="2377440"/>
-            <a:ext cx="2881274" cy="310896"/>
-          </a:xfrm>
-          <a:prstGeom prst="rect">
-            <a:avLst/>
-          </a:prstGeom>
-          <a:noFill/>
-          <a:ln/>
-        </p:spPr>
-        <p:txBody>
-          <a:bodyPr wrap="square" lIns="0" tIns="0" rIns="0" bIns="0" rtlCol="0" anchor="ctr"/>
-          <a:lstStyle/>
-          <a:p>
-            <a:pPr indent="0" marL="0">
-              <a:buNone/>
-            </a:pPr>
-            <a:r>
-              <a:rPr lang="en-US" sz="1500" b="1" dirty="0">
+          <p:cNvPr id="25" name="Text 23"/>
+          <p:cNvSpPr txBox="1"/>
+          <p:nvPr/>
+        </p:nvSpPr>
+        <p:spPr>
+          <a:xfrm>
+            <a:off x="566928" y="4160520"/>
+            <a:ext cx="3145536" cy="237744"/>
+          </a:xfrm>
+          <a:prstGeom prst="rect">
+            <a:avLst/>
+          </a:prstGeom>
+          <a:noFill/>
+          <a:ln/>
+        </p:spPr>
+        <p:txBody>
+          <a:bodyPr wrap="square" lIns="0" tIns="0" rIns="0" bIns="0" rtlCol="0" anchor="ctr"/>
+          <a:lstStyle/>
+          <a:p>
+            <a:pPr indent="0" marL="0">
+              <a:buNone/>
+            </a:pPr>
+            <a:r>
+              <a:rPr lang="en-US" sz="1300" b="1" dirty="0">
                 <a:solidFill>
                   <a:srgbClr val="16173A"/>
                 </a:solidFill>
@@ -5971,49 +6564,124 @@
                 <a:ea typeface="Times New Roman" pitchFamily="34" charset="-122"/>
                 <a:cs typeface="Times New Roman" pitchFamily="34" charset="-120"/>
               </a:rPr>
-              <a:t>Proportional displacement</a:t>
-            </a:r>
-            <a:endParaRPr lang="en-US" sz="1500" dirty="0"/>
-          </a:p>
-        </p:txBody>
-      </p:sp>
-      <p:sp>
-        <p:nvSpPr>
-          <p:cNvPr id="13" name="Text 11"/>
-          <p:cNvSpPr txBox="1"/>
-          <p:nvPr/>
-        </p:nvSpPr>
-        <p:spPr>
-          <a:xfrm>
-            <a:off x="8450885" y="2743200"/>
-            <a:ext cx="2881274" cy="768096"/>
-          </a:xfrm>
-          <a:prstGeom prst="rect">
-            <a:avLst/>
-          </a:prstGeom>
-          <a:noFill/>
-          <a:ln/>
-        </p:spPr>
-        <p:txBody>
-          <a:bodyPr wrap="square" lIns="0" tIns="0" rIns="0" bIns="0" rtlCol="0" anchor="ctr"/>
-          <a:lstStyle/>
-          <a:p>
-            <a:pPr indent="0" marL="0">
-              <a:lnSpc>
-                <a:spcPct val="108000"/>
-              </a:lnSpc>
+              <a:t>ISPOR 2026</a:t>
+            </a:r>
+            <a:endParaRPr lang="en-US" sz="1300" dirty="0"/>
+          </a:p>
+        </p:txBody>
+      </p:sp>
+      <p:sp>
+        <p:nvSpPr>
+          <p:cNvPr id="26" name="Text 24"/>
+          <p:cNvSpPr txBox="1"/>
+          <p:nvPr/>
+        </p:nvSpPr>
+        <p:spPr>
+          <a:xfrm>
+            <a:off x="566928" y="4416552"/>
+            <a:ext cx="3145536" cy="274320"/>
+          </a:xfrm>
+          <a:prstGeom prst="rect">
+            <a:avLst/>
+          </a:prstGeom>
+          <a:noFill/>
+          <a:ln/>
+        </p:spPr>
+        <p:txBody>
+          <a:bodyPr wrap="square" lIns="0" tIns="0" rIns="0" bIns="0" rtlCol="0" anchor="ctr"/>
+          <a:lstStyle/>
+          <a:p>
+            <a:pPr indent="0" marL="0">
+              <a:buNone/>
+            </a:pPr>
+            <a:r>
+              <a:rPr lang="en-US" sz="1150" dirty="0">
+                <a:solidFill>
+                  <a:srgbClr val="56597D"/>
+                </a:solidFill>
+                <a:latin typeface="Times New Roman" pitchFamily="34" charset="0"/>
+                <a:ea typeface="Times New Roman" pitchFamily="34" charset="-122"/>
+                <a:cs typeface="Times New Roman" pitchFamily="34" charset="-120"/>
+              </a:rPr>
+              <a:t>Medicare GLP-1 pharmacy budget</a:t>
+            </a:r>
+            <a:endParaRPr lang="en-US" sz="1150" dirty="0"/>
+          </a:p>
+        </p:txBody>
+      </p:sp>
+      <p:sp>
+        <p:nvSpPr>
+          <p:cNvPr id="27" name="Text 25"/>
+          <p:cNvSpPr txBox="1"/>
+          <p:nvPr/>
+        </p:nvSpPr>
+        <p:spPr>
+          <a:xfrm>
+            <a:off x="3785616" y="4288536"/>
+            <a:ext cx="2432304" cy="274320"/>
+          </a:xfrm>
+          <a:prstGeom prst="rect">
+            <a:avLst/>
+          </a:prstGeom>
+          <a:noFill/>
+          <a:ln/>
+        </p:spPr>
+        <p:txBody>
+          <a:bodyPr wrap="square" lIns="0" tIns="0" rIns="0" bIns="0" rtlCol="0" anchor="ctr"/>
+          <a:lstStyle/>
+          <a:p>
+            <a:pPr indent="0" marL="0">
+              <a:buNone/>
+            </a:pPr>
+            <a:r>
+              <a:rPr lang="en-US" sz="1200" dirty="0">
+                <a:solidFill>
+                  <a:srgbClr val="34365A"/>
+                </a:solidFill>
+                <a:latin typeface="Times New Roman" pitchFamily="34" charset="0"/>
+                <a:ea typeface="Times New Roman" pitchFamily="34" charset="-122"/>
+                <a:cs typeface="Times New Roman" pitchFamily="34" charset="-120"/>
+              </a:rPr>
+              <a:t>Pharmacy budget, 1 year</a:t>
+            </a:r>
+            <a:endParaRPr lang="en-US" sz="1200" dirty="0"/>
+          </a:p>
+        </p:txBody>
+      </p:sp>
+      <p:sp>
+        <p:nvSpPr>
+          <p:cNvPr id="28" name="Text 26"/>
+          <p:cNvSpPr txBox="1"/>
+          <p:nvPr/>
+        </p:nvSpPr>
+        <p:spPr>
+          <a:xfrm>
+            <a:off x="6309360" y="4288536"/>
+            <a:ext cx="1975104" cy="274320"/>
+          </a:xfrm>
+          <a:prstGeom prst="rect">
+            <a:avLst/>
+          </a:prstGeom>
+          <a:noFill/>
+          <a:ln/>
+        </p:spPr>
+        <p:txBody>
+          <a:bodyPr wrap="square" lIns="0" tIns="0" rIns="0" bIns="0" rtlCol="0" anchor="ctr"/>
+          <a:lstStyle/>
+          <a:p>
+            <a:pPr algn="r" indent="0" marL="0">
               <a:buNone/>
             </a:pPr>
             <a:r>
               <a:rPr lang="en-US" sz="1250" dirty="0">
                 <a:solidFill>
-                  <a:srgbClr val="56597D"/>
-                </a:solidFill>
-                <a:latin typeface="Times New Roman" pitchFamily="34" charset="0"/>
-                <a:ea typeface="Times New Roman" pitchFamily="34" charset="-122"/>
-                <a:cs typeface="Times New Roman" pitchFamily="34" charset="-120"/>
-              </a:rPr>
-              <a:t>When the new drug takes share it is drawn evenly from comparators. Real displacement rarely is.</a:t>
+                  <a:srgbClr val="34365A"/>
+                </a:solidFill>
+                <a:latin typeface="Times New Roman" pitchFamily="34" charset="0"/>
+                <a:ea typeface="Times New Roman" pitchFamily="34" charset="-122"/>
+                <a:cs typeface="Times New Roman" pitchFamily="34" charset="-120"/>
+              </a:rPr>
+              <a:t>$2,498,114,254</a:t>
             </a:r>
             <a:endParaRPr lang="en-US" sz="1250" dirty="0"/>
           </a:p>
@@ -6021,18 +6689,96 @@
       </p:sp>
       <p:sp>
         <p:nvSpPr>
-          <p:cNvPr id="14" name="Shape 12"/>
+          <p:cNvPr id="29" name="Text 27"/>
+          <p:cNvSpPr txBox="1"/>
+          <p:nvPr/>
+        </p:nvSpPr>
+        <p:spPr>
+          <a:xfrm>
+            <a:off x="8375904" y="4288536"/>
+            <a:ext cx="1975104" cy="274320"/>
+          </a:xfrm>
+          <a:prstGeom prst="rect">
+            <a:avLst/>
+          </a:prstGeom>
+          <a:noFill/>
+          <a:ln/>
+        </p:spPr>
+        <p:txBody>
+          <a:bodyPr wrap="square" lIns="0" tIns="0" rIns="0" bIns="0" rtlCol="0" anchor="ctr"/>
+          <a:lstStyle/>
+          <a:p>
+            <a:pPr algn="r" indent="0" marL="0">
+              <a:buNone/>
+            </a:pPr>
+            <a:r>
+              <a:rPr lang="en-US" sz="1250" b="1" dirty="0">
+                <a:solidFill>
+                  <a:srgbClr val="16173A"/>
+                </a:solidFill>
+                <a:latin typeface="Times New Roman" pitchFamily="34" charset="0"/>
+                <a:ea typeface="Times New Roman" pitchFamily="34" charset="-122"/>
+                <a:cs typeface="Times New Roman" pitchFamily="34" charset="-120"/>
+              </a:rPr>
+              <a:t>$2,497,728,240</a:t>
+            </a:r>
+            <a:endParaRPr lang="en-US" sz="1250" dirty="0"/>
+          </a:p>
+        </p:txBody>
+      </p:sp>
+      <p:sp>
+        <p:nvSpPr>
+          <p:cNvPr id="30" name="Text 28"/>
+          <p:cNvSpPr txBox="1"/>
+          <p:nvPr/>
+        </p:nvSpPr>
+        <p:spPr>
+          <a:xfrm>
+            <a:off x="10424160" y="4288536"/>
+            <a:ext cx="1197864" cy="274320"/>
+          </a:xfrm>
+          <a:prstGeom prst="rect">
+            <a:avLst/>
+          </a:prstGeom>
+          <a:noFill/>
+          <a:ln/>
+        </p:spPr>
+        <p:txBody>
+          <a:bodyPr wrap="square" lIns="0" tIns="0" rIns="0" bIns="0" rtlCol="0" anchor="ctr"/>
+          <a:lstStyle/>
+          <a:p>
+            <a:pPr algn="r" indent="0" marL="0">
+              <a:buNone/>
+            </a:pPr>
+            <a:r>
+              <a:rPr lang="en-US" sz="1250" b="1" dirty="0">
+                <a:solidFill>
+                  <a:srgbClr val="5B3BD4"/>
+                </a:solidFill>
+                <a:latin typeface="Times New Roman" pitchFamily="34" charset="0"/>
+                <a:ea typeface="Times New Roman" pitchFamily="34" charset="-122"/>
+                <a:cs typeface="Times New Roman" pitchFamily="34" charset="-120"/>
+              </a:rPr>
+              <a:t>-0.02%</a:t>
+            </a:r>
+            <a:endParaRPr lang="en-US" sz="1250" dirty="0"/>
+          </a:p>
+        </p:txBody>
+      </p:sp>
+      <p:sp>
+        <p:nvSpPr>
+          <p:cNvPr id="31" name="Shape 29"/>
           <p:cNvSpPr/>
           <p:nvPr/>
         </p:nvSpPr>
         <p:spPr>
           <a:xfrm>
-            <a:off x="566928" y="3895344"/>
-            <a:ext cx="3466490" cy="1554480"/>
+            <a:off x="438912" y="4901184"/>
+            <a:ext cx="11313871" cy="768096"/>
           </a:xfrm>
           <a:prstGeom prst="roundRect">
             <a:avLst>
-              <a:gd name="adj" fmla="val 3529"/>
+              <a:gd name="adj" fmla="val 7143"/>
             </a:avLst>
           </a:prstGeom>
           <a:solidFill>
@@ -6050,30 +6796,30 @@
       </p:sp>
       <p:sp>
         <p:nvSpPr>
-          <p:cNvPr id="15" name="Text 13"/>
-          <p:cNvSpPr txBox="1"/>
-          <p:nvPr/>
-        </p:nvSpPr>
-        <p:spPr>
-          <a:xfrm>
-            <a:off x="859536" y="4151376"/>
-            <a:ext cx="2881274" cy="310896"/>
-          </a:xfrm>
-          <a:prstGeom prst="rect">
-            <a:avLst/>
-          </a:prstGeom>
-          <a:noFill/>
-          <a:ln/>
-        </p:spPr>
-        <p:txBody>
-          <a:bodyPr wrap="square" lIns="0" tIns="0" rIns="0" bIns="0" rtlCol="0" anchor="ctr"/>
-          <a:lstStyle/>
-          <a:p>
-            <a:pPr indent="0" marL="0">
-              <a:buNone/>
-            </a:pPr>
-            <a:r>
-              <a:rPr lang="en-US" sz="1500" b="1" dirty="0">
+          <p:cNvPr id="32" name="Text 30"/>
+          <p:cNvSpPr txBox="1"/>
+          <p:nvPr/>
+        </p:nvSpPr>
+        <p:spPr>
+          <a:xfrm>
+            <a:off x="566928" y="5020056"/>
+            <a:ext cx="3145536" cy="237744"/>
+          </a:xfrm>
+          <a:prstGeom prst="rect">
+            <a:avLst/>
+          </a:prstGeom>
+          <a:noFill/>
+          <a:ln/>
+        </p:spPr>
+        <p:txBody>
+          <a:bodyPr wrap="square" lIns="0" tIns="0" rIns="0" bIns="0" rtlCol="0" anchor="ctr"/>
+          <a:lstStyle/>
+          <a:p>
+            <a:pPr indent="0" marL="0">
+              <a:buNone/>
+            </a:pPr>
+            <a:r>
+              <a:rPr lang="en-US" sz="1300" b="1" dirty="0">
                 <a:solidFill>
                   <a:srgbClr val="16173A"/>
                 </a:solidFill>
@@ -6081,7 +6827,477 @@
                 <a:ea typeface="Times New Roman" pitchFamily="34" charset="-122"/>
                 <a:cs typeface="Times New Roman" pitchFamily="34" charset="-120"/>
               </a:rPr>
-              <a:t>One-way sensitivity</a:t>
+              <a:t>PharmacoEconomics 2021</a:t>
+            </a:r>
+            <a:endParaRPr lang="en-US" sz="1300" dirty="0"/>
+          </a:p>
+        </p:txBody>
+      </p:sp>
+      <p:sp>
+        <p:nvSpPr>
+          <p:cNvPr id="33" name="Text 31"/>
+          <p:cNvSpPr txBox="1"/>
+          <p:nvPr/>
+        </p:nvSpPr>
+        <p:spPr>
+          <a:xfrm>
+            <a:off x="566928" y="5276088"/>
+            <a:ext cx="3145536" cy="274320"/>
+          </a:xfrm>
+          <a:prstGeom prst="rect">
+            <a:avLst/>
+          </a:prstGeom>
+          <a:noFill/>
+          <a:ln/>
+        </p:spPr>
+        <p:txBody>
+          <a:bodyPr wrap="square" lIns="0" tIns="0" rIns="0" bIns="0" rtlCol="0" anchor="ctr"/>
+          <a:lstStyle/>
+          <a:p>
+            <a:pPr indent="0" marL="0">
+              <a:buNone/>
+            </a:pPr>
+            <a:r>
+              <a:rPr lang="en-US" sz="1150" dirty="0">
+                <a:solidFill>
+                  <a:srgbClr val="56597D"/>
+                </a:solidFill>
+                <a:latin typeface="Times New Roman" pitchFamily="34" charset="0"/>
+                <a:ea typeface="Times New Roman" pitchFamily="34" charset="-122"/>
+                <a:cs typeface="Times New Roman" pitchFamily="34" charset="-120"/>
+              </a:rPr>
+              <a:t>Oral semaglutide vs sitagliptin, US</a:t>
+            </a:r>
+            <a:endParaRPr lang="en-US" sz="1150" dirty="0"/>
+          </a:p>
+        </p:txBody>
+      </p:sp>
+      <p:sp>
+        <p:nvSpPr>
+          <p:cNvPr id="34" name="Text 32"/>
+          <p:cNvSpPr txBox="1"/>
+          <p:nvPr/>
+        </p:nvSpPr>
+        <p:spPr>
+          <a:xfrm>
+            <a:off x="3785616" y="5148072"/>
+            <a:ext cx="2432304" cy="274320"/>
+          </a:xfrm>
+          <a:prstGeom prst="rect">
+            <a:avLst/>
+          </a:prstGeom>
+          <a:noFill/>
+          <a:ln/>
+        </p:spPr>
+        <p:txBody>
+          <a:bodyPr wrap="square" lIns="0" tIns="0" rIns="0" bIns="0" rtlCol="0" anchor="ctr"/>
+          <a:lstStyle/>
+          <a:p>
+            <a:pPr indent="0" marL="0">
+              <a:buNone/>
+            </a:pPr>
+            <a:r>
+              <a:rPr lang="en-US" sz="1200" dirty="0">
+                <a:solidFill>
+                  <a:srgbClr val="34365A"/>
+                </a:solidFill>
+                <a:latin typeface="Times New Roman" pitchFamily="34" charset="0"/>
+                <a:ea typeface="Times New Roman" pitchFamily="34" charset="-122"/>
+                <a:cs typeface="Times New Roman" pitchFamily="34" charset="-120"/>
+              </a:rPr>
+              <a:t>Incremental impact, 5 years</a:t>
+            </a:r>
+            <a:endParaRPr lang="en-US" sz="1200" dirty="0"/>
+          </a:p>
+        </p:txBody>
+      </p:sp>
+      <p:sp>
+        <p:nvSpPr>
+          <p:cNvPr id="35" name="Text 33"/>
+          <p:cNvSpPr txBox="1"/>
+          <p:nvPr/>
+        </p:nvSpPr>
+        <p:spPr>
+          <a:xfrm>
+            <a:off x="6309360" y="5148072"/>
+            <a:ext cx="1975104" cy="274320"/>
+          </a:xfrm>
+          <a:prstGeom prst="rect">
+            <a:avLst/>
+          </a:prstGeom>
+          <a:noFill/>
+          <a:ln/>
+        </p:spPr>
+        <p:txBody>
+          <a:bodyPr wrap="square" lIns="0" tIns="0" rIns="0" bIns="0" rtlCol="0" anchor="ctr"/>
+          <a:lstStyle/>
+          <a:p>
+            <a:pPr algn="r" indent="0" marL="0">
+              <a:buNone/>
+            </a:pPr>
+            <a:r>
+              <a:rPr lang="en-US" sz="1250" dirty="0">
+                <a:solidFill>
+                  <a:srgbClr val="34365A"/>
+                </a:solidFill>
+                <a:latin typeface="Times New Roman" pitchFamily="34" charset="0"/>
+                <a:ea typeface="Times New Roman" pitchFamily="34" charset="-122"/>
+                <a:cs typeface="Times New Roman" pitchFamily="34" charset="-120"/>
+              </a:rPr>
+              <a:t>$4,620,201</a:t>
+            </a:r>
+            <a:endParaRPr lang="en-US" sz="1250" dirty="0"/>
+          </a:p>
+        </p:txBody>
+      </p:sp>
+      <p:sp>
+        <p:nvSpPr>
+          <p:cNvPr id="36" name="Text 34"/>
+          <p:cNvSpPr txBox="1"/>
+          <p:nvPr/>
+        </p:nvSpPr>
+        <p:spPr>
+          <a:xfrm>
+            <a:off x="8375904" y="5148072"/>
+            <a:ext cx="1975104" cy="274320"/>
+          </a:xfrm>
+          <a:prstGeom prst="rect">
+            <a:avLst/>
+          </a:prstGeom>
+          <a:noFill/>
+          <a:ln/>
+        </p:spPr>
+        <p:txBody>
+          <a:bodyPr wrap="square" lIns="0" tIns="0" rIns="0" bIns="0" rtlCol="0" anchor="ctr"/>
+          <a:lstStyle/>
+          <a:p>
+            <a:pPr algn="r" indent="0" marL="0">
+              <a:buNone/>
+            </a:pPr>
+            <a:r>
+              <a:rPr lang="en-US" sz="1250" b="1" dirty="0">
+                <a:solidFill>
+                  <a:srgbClr val="16173A"/>
+                </a:solidFill>
+                <a:latin typeface="Times New Roman" pitchFamily="34" charset="0"/>
+                <a:ea typeface="Times New Roman" pitchFamily="34" charset="-122"/>
+                <a:cs typeface="Times New Roman" pitchFamily="34" charset="-120"/>
+              </a:rPr>
+              <a:t>$4,620,519</a:t>
+            </a:r>
+            <a:endParaRPr lang="en-US" sz="1250" dirty="0"/>
+          </a:p>
+        </p:txBody>
+      </p:sp>
+      <p:sp>
+        <p:nvSpPr>
+          <p:cNvPr id="37" name="Text 35"/>
+          <p:cNvSpPr txBox="1"/>
+          <p:nvPr/>
+        </p:nvSpPr>
+        <p:spPr>
+          <a:xfrm>
+            <a:off x="10424160" y="5148072"/>
+            <a:ext cx="1197864" cy="274320"/>
+          </a:xfrm>
+          <a:prstGeom prst="rect">
+            <a:avLst/>
+          </a:prstGeom>
+          <a:noFill/>
+          <a:ln/>
+        </p:spPr>
+        <p:txBody>
+          <a:bodyPr wrap="square" lIns="0" tIns="0" rIns="0" bIns="0" rtlCol="0" anchor="ctr"/>
+          <a:lstStyle/>
+          <a:p>
+            <a:pPr algn="r" indent="0" marL="0">
+              <a:buNone/>
+            </a:pPr>
+            <a:r>
+              <a:rPr lang="en-US" sz="1250" b="1" dirty="0">
+                <a:solidFill>
+                  <a:srgbClr val="5B3BD4"/>
+                </a:solidFill>
+                <a:latin typeface="Times New Roman" pitchFamily="34" charset="0"/>
+                <a:ea typeface="Times New Roman" pitchFamily="34" charset="-122"/>
+                <a:cs typeface="Times New Roman" pitchFamily="34" charset="-120"/>
+              </a:rPr>
+              <a:t>+0.01%</a:t>
+            </a:r>
+            <a:endParaRPr lang="en-US" sz="1250" dirty="0"/>
+          </a:p>
+        </p:txBody>
+      </p:sp>
+      <p:sp>
+        <p:nvSpPr>
+          <p:cNvPr id="38" name="Text 36"/>
+          <p:cNvSpPr txBox="1"/>
+          <p:nvPr/>
+        </p:nvSpPr>
+        <p:spPr>
+          <a:xfrm>
+            <a:off x="566928" y="5888736"/>
+            <a:ext cx="11057839" cy="457200"/>
+          </a:xfrm>
+          <a:prstGeom prst="rect">
+            <a:avLst/>
+          </a:prstGeom>
+          <a:noFill/>
+          <a:ln/>
+        </p:spPr>
+        <p:txBody>
+          <a:bodyPr wrap="square" lIns="0" tIns="0" rIns="0" bIns="0" rtlCol="0" anchor="ctr"/>
+          <a:lstStyle/>
+          <a:p>
+            <a:pPr indent="0" marL="0">
+              <a:lnSpc>
+                <a:spcPct val="106000"/>
+              </a:lnSpc>
+              <a:buNone/>
+            </a:pPr>
+            <a:r>
+              <a:rPr lang="en-US" sz="1100" i="1" dirty="0">
+                <a:solidFill>
+                  <a:srgbClr val="56597D"/>
+                </a:solidFill>
+                <a:latin typeface="Times New Roman" pitchFamily="34" charset="0"/>
+                <a:ea typeface="Times New Roman" pitchFamily="34" charset="-122"/>
+                <a:cs typeface="Times New Roman" pitchFamily="34" charset="-120"/>
+              </a:rPr>
+              <a:t>Each workbook is imported onto a deliberately mismatched disease, so a value inherited from the previous model fails the test rather than passing quietly. The published figures come from each workbook's evidence sheet and have not been re-checked against the papers.</a:t>
+            </a:r>
+            <a:endParaRPr lang="en-US" sz="1100" dirty="0"/>
+          </a:p>
+        </p:txBody>
+      </p:sp>
+      <p:sp>
+        <p:nvSpPr>
+          <p:cNvPr id="40" name="Text 37"/>
+          <p:cNvSpPr txBox="1"/>
+          <p:nvPr/>
+        </p:nvSpPr>
+        <p:spPr>
+          <a:xfrm>
+            <a:off x="566928" y="6336792"/>
+            <a:ext cx="5486400" cy="256032"/>
+          </a:xfrm>
+          <a:prstGeom prst="rect">
+            <a:avLst/>
+          </a:prstGeom>
+          <a:noFill/>
+          <a:ln/>
+        </p:spPr>
+        <p:txBody>
+          <a:bodyPr wrap="square" lIns="0" tIns="0" rIns="0" bIns="0" rtlCol="0" anchor="ctr"/>
+          <a:lstStyle/>
+          <a:p>
+            <a:pPr indent="0" marL="0">
+              <a:buNone/>
+            </a:pPr>
+            <a:r>
+              <a:rPr lang="en-US" sz="1050" dirty="0">
+                <a:solidFill>
+                  <a:srgbClr val="DAD6F2"/>
+                </a:solidFill>
+                <a:latin typeface="Times New Roman" pitchFamily="34" charset="0"/>
+                <a:ea typeface="Times New Roman" pitchFamily="34" charset="-122"/>
+                <a:cs typeface="Times New Roman" pitchFamily="34" charset="-120"/>
+              </a:rPr>
+              <a:t>BIET  ·  Team Denovo  ·  IBAB</a:t>
+            </a:r>
+            <a:endParaRPr lang="en-US" sz="1050" dirty="0"/>
+          </a:p>
+        </p:txBody>
+      </p:sp>
+      <p:sp>
+        <p:nvSpPr>
+          <p:cNvPr id="41" name="Text 38"/>
+          <p:cNvSpPr txBox="1"/>
+          <p:nvPr/>
+        </p:nvSpPr>
+        <p:spPr>
+          <a:xfrm>
+            <a:off x="10710367" y="6336792"/>
+            <a:ext cx="914400" cy="256032"/>
+          </a:xfrm>
+          <a:prstGeom prst="rect">
+            <a:avLst/>
+          </a:prstGeom>
+          <a:noFill/>
+          <a:ln/>
+        </p:spPr>
+        <p:txBody>
+          <a:bodyPr wrap="square" lIns="0" tIns="0" rIns="0" bIns="0" rtlCol="0" anchor="ctr"/>
+          <a:lstStyle/>
+          <a:p>
+            <a:pPr algn="r" indent="0" marL="0">
+              <a:buNone/>
+            </a:pPr>
+            <a:r>
+              <a:rPr lang="en-US" sz="1050" b="1" dirty="0">
+                <a:solidFill>
+                  <a:srgbClr val="DAD6F2"/>
+                </a:solidFill>
+                <a:latin typeface="Times New Roman" pitchFamily="34" charset="0"/>
+                <a:ea typeface="Times New Roman" pitchFamily="34" charset="-122"/>
+                <a:cs typeface="Times New Roman" pitchFamily="34" charset="-120"/>
+              </a:rPr>
+              <a:t>14</a:t>
+            </a:r>
+            <a:endParaRPr lang="en-US" sz="1050" dirty="0"/>
+          </a:p>
+        </p:txBody>
+      </p:sp>
+    </p:spTree>
+  </p:cSld>
+  <p:clrMapOvr>
+    <a:masterClrMapping/>
+  </p:clrMapOvr>
+</p:sld>
+</file>
+
+<file path=ppt/slides/slide15.xml><?xml version="1.0" encoding="utf-8"?>
+<p:sld xmlns:a="http://schemas.openxmlformats.org/drawingml/2006/main" xmlns:r="http://schemas.openxmlformats.org/officeDocument/2006/relationships" xmlns:p="http://schemas.openxmlformats.org/presentationml/2006/main">
+  <p:cSld name="Slide 15">
+    <p:bg>
+      <p:bgPr>
+        <a:solidFill>
+          <a:srgbClr val="FFFFFF"/>
+        </a:solidFill>
+      </p:bgPr>
+    </p:bg>
+    <p:spTree>
+      <p:nvGrpSpPr>
+        <p:cNvPr id="1" name=""/>
+        <p:cNvGrpSpPr/>
+        <p:nvPr/>
+      </p:nvGrpSpPr>
+      <p:grpSpPr>
+        <a:xfrm>
+          <a:off x="0" y="0"/>
+          <a:ext cx="0" cy="0"/>
+          <a:chOff x="0" y="0"/>
+          <a:chExt cx="0" cy="0"/>
+        </a:xfrm>
+      </p:grpSpPr>
+      <p:sp>
+        <p:nvSpPr>
+          <p:cNvPr id="2" name="Text 0"/>
+          <p:cNvSpPr txBox="1"/>
+          <p:nvPr/>
+        </p:nvSpPr>
+        <p:spPr>
+          <a:xfrm>
+            <a:off x="566928" y="365760"/>
+            <a:ext cx="11057839" cy="237744"/>
+          </a:xfrm>
+          <a:prstGeom prst="rect">
+            <a:avLst/>
+          </a:prstGeom>
+          <a:noFill/>
+          <a:ln/>
+        </p:spPr>
+        <p:txBody>
+          <a:bodyPr wrap="square" lIns="0" tIns="0" rIns="0" bIns="0" rtlCol="0" anchor="ctr"/>
+          <a:lstStyle/>
+          <a:p>
+            <a:pPr indent="0" marL="0">
+              <a:buNone/>
+            </a:pPr>
+            <a:r>
+              <a:rPr lang="en-US" sz="1200" b="1" spc="240" kern="0" dirty="0">
+                <a:solidFill>
+                  <a:srgbClr val="5B3BD4"/>
+                </a:solidFill>
+                <a:latin typeface="Times New Roman" pitchFamily="34" charset="0"/>
+                <a:ea typeface="Times New Roman" pitchFamily="34" charset="-122"/>
+                <a:cs typeface="Times New Roman" pitchFamily="34" charset="-120"/>
+              </a:rPr>
+              <a:t>BACKUP · LIMITATIONS</a:t>
+            </a:r>
+            <a:endParaRPr lang="en-US" sz="1200" dirty="0"/>
+          </a:p>
+        </p:txBody>
+      </p:sp>
+      <p:sp>
+        <p:nvSpPr>
+          <p:cNvPr id="3" name="Text 1"/>
+          <p:cNvSpPr txBox="1"/>
+          <p:nvPr/>
+        </p:nvSpPr>
+        <p:spPr>
+          <a:xfrm>
+            <a:off x="566928" y="676656"/>
+            <a:ext cx="11057839" cy="658368"/>
+          </a:xfrm>
+          <a:prstGeom prst="rect">
+            <a:avLst/>
+          </a:prstGeom>
+          <a:noFill/>
+          <a:ln/>
+        </p:spPr>
+        <p:txBody>
+          <a:bodyPr wrap="square" lIns="0" tIns="0" rIns="0" bIns="0" rtlCol="0" anchor="ctr"/>
+          <a:lstStyle/>
+          <a:p>
+            <a:pPr indent="0" marL="0">
+              <a:lnSpc>
+                <a:spcPct val="92000"/>
+              </a:lnSpc>
+              <a:buNone/>
+            </a:pPr>
+            <a:r>
+              <a:rPr lang="en-US" sz="3200" b="1" dirty="0">
+                <a:solidFill>
+                  <a:srgbClr val="16173A"/>
+                </a:solidFill>
+                <a:latin typeface="Times New Roman" pitchFamily="34" charset="0"/>
+                <a:ea typeface="Times New Roman" pitchFamily="34" charset="-122"/>
+                <a:cs typeface="Times New Roman" pitchFamily="34" charset="-120"/>
+              </a:rPr>
+              <a:t>What this is not</a:t>
+            </a:r>
+            <a:endParaRPr lang="en-US" sz="3200" dirty="0"/>
+          </a:p>
+        </p:txBody>
+      </p:sp>
+      <p:sp>
+        <p:nvSpPr>
+          <p:cNvPr id="4" name="Text 2"/>
+          <p:cNvSpPr txBox="1"/>
+          <p:nvPr/>
+        </p:nvSpPr>
+        <p:spPr>
+          <a:xfrm>
+            <a:off x="566928" y="1335024"/>
+            <a:ext cx="9966960" cy="457200"/>
+          </a:xfrm>
+          <a:prstGeom prst="rect">
+            <a:avLst/>
+          </a:prstGeom>
+          <a:noFill/>
+          <a:ln/>
+        </p:spPr>
+        <p:txBody>
+          <a:bodyPr wrap="square" lIns="0" tIns="0" rIns="0" bIns="0" rtlCol="0" anchor="ctr"/>
+          <a:lstStyle/>
+          <a:p>
+            <a:pPr indent="0" marL="0">
+              <a:lnSpc>
+                <a:spcPct val="112000"/>
+              </a:lnSpc>
+              <a:buNone/>
+            </a:pPr>
+            <a:r>
+              <a:rPr lang="en-US" sz="1500" dirty="0">
+                <a:solidFill>
+                  <a:srgbClr val="56597D"/>
+                </a:solidFill>
+                <a:latin typeface="Times New Roman" pitchFamily="34" charset="0"/>
+                <a:ea typeface="Times New Roman" pitchFamily="34" charset="-122"/>
+                <a:cs typeface="Times New Roman" pitchFamily="34" charset="-120"/>
+              </a:rPr>
+              <a:t>An early-stage estimation tool, not a validated HTA submission model. Clinical, payer, epidemiological and price assumptions should be reviewed by HEOR specialists before any decision relies on them.</a:t>
             </a:r>
             <a:endParaRPr lang="en-US" sz="1500" dirty="0"/>
           </a:p>
@@ -6089,55 +7305,13 @@
       </p:sp>
       <p:sp>
         <p:nvSpPr>
-          <p:cNvPr id="16" name="Text 14"/>
-          <p:cNvSpPr txBox="1"/>
-          <p:nvPr/>
-        </p:nvSpPr>
-        <p:spPr>
-          <a:xfrm>
-            <a:off x="859536" y="4517136"/>
-            <a:ext cx="2881274" cy="768096"/>
-          </a:xfrm>
-          <a:prstGeom prst="rect">
-            <a:avLst/>
-          </a:prstGeom>
-          <a:noFill/>
-          <a:ln/>
-        </p:spPr>
-        <p:txBody>
-          <a:bodyPr wrap="square" lIns="0" tIns="0" rIns="0" bIns="0" rtlCol="0" anchor="ctr"/>
-          <a:lstStyle/>
-          <a:p>
-            <a:pPr indent="0" marL="0">
-              <a:lnSpc>
-                <a:spcPct val="108000"/>
-              </a:lnSpc>
-              <a:buNone/>
-            </a:pPr>
-            <a:r>
-              <a:rPr lang="en-US" sz="1250" dirty="0">
-                <a:solidFill>
-                  <a:srgbClr val="56597D"/>
-                </a:solidFill>
-                <a:latin typeface="Times New Roman" pitchFamily="34" charset="0"/>
-                <a:ea typeface="Times New Roman" pitchFamily="34" charset="-122"/>
-                <a:cs typeface="Times New Roman" pitchFamily="34" charset="-120"/>
-              </a:rPr>
-              <a:t>No probabilistic analysis and no correlated parameter sampling.</a:t>
-            </a:r>
-            <a:endParaRPr lang="en-US" sz="1250" dirty="0"/>
-          </a:p>
-        </p:txBody>
-      </p:sp>
-      <p:sp>
-        <p:nvSpPr>
-          <p:cNvPr id="17" name="Shape 15"/>
+          <p:cNvPr id="5" name="Shape 3"/>
           <p:cNvSpPr/>
           <p:nvPr/>
         </p:nvSpPr>
         <p:spPr>
           <a:xfrm>
-            <a:off x="4362602" y="3895344"/>
+            <a:off x="566928" y="2121408"/>
             <a:ext cx="3466490" cy="1554480"/>
           </a:xfrm>
           <a:prstGeom prst="roundRect">
@@ -6160,13 +7334,13 @@
       </p:sp>
       <p:sp>
         <p:nvSpPr>
-          <p:cNvPr id="18" name="Text 16"/>
-          <p:cNvSpPr txBox="1"/>
-          <p:nvPr/>
-        </p:nvSpPr>
-        <p:spPr>
-          <a:xfrm>
-            <a:off x="4655210" y="4151376"/>
+          <p:cNvPr id="6" name="Text 4"/>
+          <p:cNvSpPr txBox="1"/>
+          <p:nvPr/>
+        </p:nvSpPr>
+        <p:spPr>
+          <a:xfrm>
+            <a:off x="859536" y="2377440"/>
             <a:ext cx="2881274" cy="310896"/>
           </a:xfrm>
           <a:prstGeom prst="rect">
@@ -6191,7 +7365,7 @@
                 <a:ea typeface="Times New Roman" pitchFamily="34" charset="-122"/>
                 <a:cs typeface="Times New Roman" pitchFamily="34" charset="-120"/>
               </a:rPr>
-              <a:t>Illustrative demo values</a:t>
+              <a:t>Single country</a:t>
             </a:r>
             <a:endParaRPr lang="en-US" sz="1500" dirty="0"/>
           </a:p>
@@ -6199,13 +7373,13 @@
       </p:sp>
       <p:sp>
         <p:nvSpPr>
-          <p:cNvPr id="19" name="Text 17"/>
-          <p:cNvSpPr txBox="1"/>
-          <p:nvPr/>
-        </p:nvSpPr>
-        <p:spPr>
-          <a:xfrm>
-            <a:off x="4655210" y="4517136"/>
+          <p:cNvPr id="7" name="Text 5"/>
+          <p:cNvSpPr txBox="1"/>
+          <p:nvPr/>
+        </p:nvSpPr>
+        <p:spPr>
+          <a:xfrm>
+            <a:off x="859536" y="2743200"/>
             <a:ext cx="2881274" cy="768096"/>
           </a:xfrm>
           <a:prstGeom prst="rect">
@@ -6233,7 +7407,7 @@
                 <a:ea typeface="Times New Roman" pitchFamily="34" charset="-122"/>
                 <a:cs typeface="Times New Roman" pitchFamily="34" charset="-120"/>
               </a:rPr>
-              <a:t>The built-in scenario is plausible but not drawn from a validated published source.</a:t>
+              <a:t>One market, one currency and one price set per run. Multi-country aggregation is not implemented.</a:t>
             </a:r>
             <a:endParaRPr lang="en-US" sz="1250" dirty="0"/>
           </a:p>
@@ -6241,13 +7415,13 @@
       </p:sp>
       <p:sp>
         <p:nvSpPr>
-          <p:cNvPr id="20" name="Shape 18"/>
+          <p:cNvPr id="8" name="Shape 6"/>
           <p:cNvSpPr/>
           <p:nvPr/>
         </p:nvSpPr>
         <p:spPr>
           <a:xfrm>
-            <a:off x="8158277" y="3895344"/>
+            <a:off x="4362602" y="2121408"/>
             <a:ext cx="3466490" cy="1554480"/>
           </a:xfrm>
           <a:prstGeom prst="roundRect">
@@ -6270,13 +7444,13 @@
       </p:sp>
       <p:sp>
         <p:nvSpPr>
-          <p:cNvPr id="21" name="Text 19"/>
-          <p:cNvSpPr txBox="1"/>
-          <p:nvPr/>
-        </p:nvSpPr>
-        <p:spPr>
-          <a:xfrm>
-            <a:off x="8450885" y="4151376"/>
+          <p:cNvPr id="9" name="Text 7"/>
+          <p:cNvSpPr txBox="1"/>
+          <p:nvPr/>
+        </p:nvSpPr>
+        <p:spPr>
+          <a:xfrm>
+            <a:off x="4655210" y="2377440"/>
             <a:ext cx="2881274" cy="310896"/>
           </a:xfrm>
           <a:prstGeom prst="rect">
@@ -6301,7 +7475,7 @@
                 <a:ea typeface="Times New Roman" pitchFamily="34" charset="-122"/>
                 <a:cs typeface="Times New Roman" pitchFamily="34" charset="-120"/>
               </a:rPr>
-              <a:t>Free-tier hosting</a:t>
+              <a:t>Subgroups are partial</a:t>
             </a:r>
             <a:endParaRPr lang="en-US" sz="1500" dirty="0"/>
           </a:p>
@@ -6309,13 +7483,13 @@
       </p:sp>
       <p:sp>
         <p:nvSpPr>
-          <p:cNvPr id="22" name="Text 20"/>
-          <p:cNvSpPr txBox="1"/>
-          <p:nvPr/>
-        </p:nvSpPr>
-        <p:spPr>
-          <a:xfrm>
-            <a:off x="8450885" y="4517136"/>
+          <p:cNvPr id="10" name="Text 8"/>
+          <p:cNvSpPr txBox="1"/>
+          <p:nvPr/>
+        </p:nvSpPr>
+        <p:spPr>
+          <a:xfrm>
+            <a:off x="4655210" y="2743200"/>
             <a:ext cx="2881274" cy="768096"/>
           </a:xfrm>
           <a:prstGeom prst="rect">
@@ -6343,6 +7517,446 @@
                 <a:ea typeface="Times New Roman" pitchFamily="34" charset="-122"/>
                 <a:cs typeface="Times New Roman" pitchFamily="34" charset="-120"/>
               </a:rPr>
+              <a:t>Selecting a subgroup narrows the population but inherits the parent's cost and outcome parameters.</a:t>
+            </a:r>
+            <a:endParaRPr lang="en-US" sz="1250" dirty="0"/>
+          </a:p>
+        </p:txBody>
+      </p:sp>
+      <p:sp>
+        <p:nvSpPr>
+          <p:cNvPr id="11" name="Shape 9"/>
+          <p:cNvSpPr/>
+          <p:nvPr/>
+        </p:nvSpPr>
+        <p:spPr>
+          <a:xfrm>
+            <a:off x="8158277" y="2121408"/>
+            <a:ext cx="3466490" cy="1554480"/>
+          </a:xfrm>
+          <a:prstGeom prst="roundRect">
+            <a:avLst>
+              <a:gd name="adj" fmla="val 3529"/>
+            </a:avLst>
+          </a:prstGeom>
+          <a:solidFill>
+            <a:srgbClr val="F4F3FB"/>
+          </a:solidFill>
+          <a:ln/>
+          <a:effectLst>
+            <a:outerShdw sx="100000" sy="100000" kx="0" ky="0" algn="bl" rotWithShape="0" blurRad="127000" dist="25400" dir="5400000">
+              <a:srgbClr val="1B1B4A">
+                <a:alpha val="10000"/>
+              </a:srgbClr>
+            </a:outerShdw>
+          </a:effectLst>
+        </p:spPr>
+      </p:sp>
+      <p:sp>
+        <p:nvSpPr>
+          <p:cNvPr id="12" name="Text 10"/>
+          <p:cNvSpPr txBox="1"/>
+          <p:nvPr/>
+        </p:nvSpPr>
+        <p:spPr>
+          <a:xfrm>
+            <a:off x="8450885" y="2377440"/>
+            <a:ext cx="2881274" cy="310896"/>
+          </a:xfrm>
+          <a:prstGeom prst="rect">
+            <a:avLst/>
+          </a:prstGeom>
+          <a:noFill/>
+          <a:ln/>
+        </p:spPr>
+        <p:txBody>
+          <a:bodyPr wrap="square" lIns="0" tIns="0" rIns="0" bIns="0" rtlCol="0" anchor="ctr"/>
+          <a:lstStyle/>
+          <a:p>
+            <a:pPr indent="0" marL="0">
+              <a:buNone/>
+            </a:pPr>
+            <a:r>
+              <a:rPr lang="en-US" sz="1500" b="1" dirty="0">
+                <a:solidFill>
+                  <a:srgbClr val="16173A"/>
+                </a:solidFill>
+                <a:latin typeface="Times New Roman" pitchFamily="34" charset="0"/>
+                <a:ea typeface="Times New Roman" pitchFamily="34" charset="-122"/>
+                <a:cs typeface="Times New Roman" pitchFamily="34" charset="-120"/>
+              </a:rPr>
+              <a:t>Proportional displacement</a:t>
+            </a:r>
+            <a:endParaRPr lang="en-US" sz="1500" dirty="0"/>
+          </a:p>
+        </p:txBody>
+      </p:sp>
+      <p:sp>
+        <p:nvSpPr>
+          <p:cNvPr id="13" name="Text 11"/>
+          <p:cNvSpPr txBox="1"/>
+          <p:nvPr/>
+        </p:nvSpPr>
+        <p:spPr>
+          <a:xfrm>
+            <a:off x="8450885" y="2743200"/>
+            <a:ext cx="2881274" cy="768096"/>
+          </a:xfrm>
+          <a:prstGeom prst="rect">
+            <a:avLst/>
+          </a:prstGeom>
+          <a:noFill/>
+          <a:ln/>
+        </p:spPr>
+        <p:txBody>
+          <a:bodyPr wrap="square" lIns="0" tIns="0" rIns="0" bIns="0" rtlCol="0" anchor="ctr"/>
+          <a:lstStyle/>
+          <a:p>
+            <a:pPr indent="0" marL="0">
+              <a:lnSpc>
+                <a:spcPct val="108000"/>
+              </a:lnSpc>
+              <a:buNone/>
+            </a:pPr>
+            <a:r>
+              <a:rPr lang="en-US" sz="1250" dirty="0">
+                <a:solidFill>
+                  <a:srgbClr val="56597D"/>
+                </a:solidFill>
+                <a:latin typeface="Times New Roman" pitchFamily="34" charset="0"/>
+                <a:ea typeface="Times New Roman" pitchFamily="34" charset="-122"/>
+                <a:cs typeface="Times New Roman" pitchFamily="34" charset="-120"/>
+              </a:rPr>
+              <a:t>When the new drug takes share it is drawn evenly from comparators. Real displacement rarely is.</a:t>
+            </a:r>
+            <a:endParaRPr lang="en-US" sz="1250" dirty="0"/>
+          </a:p>
+        </p:txBody>
+      </p:sp>
+      <p:sp>
+        <p:nvSpPr>
+          <p:cNvPr id="14" name="Shape 12"/>
+          <p:cNvSpPr/>
+          <p:nvPr/>
+        </p:nvSpPr>
+        <p:spPr>
+          <a:xfrm>
+            <a:off x="566928" y="3895344"/>
+            <a:ext cx="3466490" cy="1554480"/>
+          </a:xfrm>
+          <a:prstGeom prst="roundRect">
+            <a:avLst>
+              <a:gd name="adj" fmla="val 3529"/>
+            </a:avLst>
+          </a:prstGeom>
+          <a:solidFill>
+            <a:srgbClr val="F4F3FB"/>
+          </a:solidFill>
+          <a:ln/>
+          <a:effectLst>
+            <a:outerShdw sx="100000" sy="100000" kx="0" ky="0" algn="bl" rotWithShape="0" blurRad="127000" dist="25400" dir="5400000">
+              <a:srgbClr val="1B1B4A">
+                <a:alpha val="10000"/>
+              </a:srgbClr>
+            </a:outerShdw>
+          </a:effectLst>
+        </p:spPr>
+      </p:sp>
+      <p:sp>
+        <p:nvSpPr>
+          <p:cNvPr id="15" name="Text 13"/>
+          <p:cNvSpPr txBox="1"/>
+          <p:nvPr/>
+        </p:nvSpPr>
+        <p:spPr>
+          <a:xfrm>
+            <a:off x="859536" y="4151376"/>
+            <a:ext cx="2881274" cy="310896"/>
+          </a:xfrm>
+          <a:prstGeom prst="rect">
+            <a:avLst/>
+          </a:prstGeom>
+          <a:noFill/>
+          <a:ln/>
+        </p:spPr>
+        <p:txBody>
+          <a:bodyPr wrap="square" lIns="0" tIns="0" rIns="0" bIns="0" rtlCol="0" anchor="ctr"/>
+          <a:lstStyle/>
+          <a:p>
+            <a:pPr indent="0" marL="0">
+              <a:buNone/>
+            </a:pPr>
+            <a:r>
+              <a:rPr lang="en-US" sz="1500" b="1" dirty="0">
+                <a:solidFill>
+                  <a:srgbClr val="16173A"/>
+                </a:solidFill>
+                <a:latin typeface="Times New Roman" pitchFamily="34" charset="0"/>
+                <a:ea typeface="Times New Roman" pitchFamily="34" charset="-122"/>
+                <a:cs typeface="Times New Roman" pitchFamily="34" charset="-120"/>
+              </a:rPr>
+              <a:t>One-way sensitivity</a:t>
+            </a:r>
+            <a:endParaRPr lang="en-US" sz="1500" dirty="0"/>
+          </a:p>
+        </p:txBody>
+      </p:sp>
+      <p:sp>
+        <p:nvSpPr>
+          <p:cNvPr id="16" name="Text 14"/>
+          <p:cNvSpPr txBox="1"/>
+          <p:nvPr/>
+        </p:nvSpPr>
+        <p:spPr>
+          <a:xfrm>
+            <a:off x="859536" y="4517136"/>
+            <a:ext cx="2881274" cy="768096"/>
+          </a:xfrm>
+          <a:prstGeom prst="rect">
+            <a:avLst/>
+          </a:prstGeom>
+          <a:noFill/>
+          <a:ln/>
+        </p:spPr>
+        <p:txBody>
+          <a:bodyPr wrap="square" lIns="0" tIns="0" rIns="0" bIns="0" rtlCol="0" anchor="ctr"/>
+          <a:lstStyle/>
+          <a:p>
+            <a:pPr indent="0" marL="0">
+              <a:lnSpc>
+                <a:spcPct val="108000"/>
+              </a:lnSpc>
+              <a:buNone/>
+            </a:pPr>
+            <a:r>
+              <a:rPr lang="en-US" sz="1250" dirty="0">
+                <a:solidFill>
+                  <a:srgbClr val="56597D"/>
+                </a:solidFill>
+                <a:latin typeface="Times New Roman" pitchFamily="34" charset="0"/>
+                <a:ea typeface="Times New Roman" pitchFamily="34" charset="-122"/>
+                <a:cs typeface="Times New Roman" pitchFamily="34" charset="-120"/>
+              </a:rPr>
+              <a:t>No probabilistic analysis and no correlated parameter sampling.</a:t>
+            </a:r>
+            <a:endParaRPr lang="en-US" sz="1250" dirty="0"/>
+          </a:p>
+        </p:txBody>
+      </p:sp>
+      <p:sp>
+        <p:nvSpPr>
+          <p:cNvPr id="17" name="Shape 15"/>
+          <p:cNvSpPr/>
+          <p:nvPr/>
+        </p:nvSpPr>
+        <p:spPr>
+          <a:xfrm>
+            <a:off x="4362602" y="3895344"/>
+            <a:ext cx="3466490" cy="1554480"/>
+          </a:xfrm>
+          <a:prstGeom prst="roundRect">
+            <a:avLst>
+              <a:gd name="adj" fmla="val 3529"/>
+            </a:avLst>
+          </a:prstGeom>
+          <a:solidFill>
+            <a:srgbClr val="F4F3FB"/>
+          </a:solidFill>
+          <a:ln/>
+          <a:effectLst>
+            <a:outerShdw sx="100000" sy="100000" kx="0" ky="0" algn="bl" rotWithShape="0" blurRad="127000" dist="25400" dir="5400000">
+              <a:srgbClr val="1B1B4A">
+                <a:alpha val="10000"/>
+              </a:srgbClr>
+            </a:outerShdw>
+          </a:effectLst>
+        </p:spPr>
+      </p:sp>
+      <p:sp>
+        <p:nvSpPr>
+          <p:cNvPr id="18" name="Text 16"/>
+          <p:cNvSpPr txBox="1"/>
+          <p:nvPr/>
+        </p:nvSpPr>
+        <p:spPr>
+          <a:xfrm>
+            <a:off x="4655210" y="4151376"/>
+            <a:ext cx="2881274" cy="310896"/>
+          </a:xfrm>
+          <a:prstGeom prst="rect">
+            <a:avLst/>
+          </a:prstGeom>
+          <a:noFill/>
+          <a:ln/>
+        </p:spPr>
+        <p:txBody>
+          <a:bodyPr wrap="square" lIns="0" tIns="0" rIns="0" bIns="0" rtlCol="0" anchor="ctr"/>
+          <a:lstStyle/>
+          <a:p>
+            <a:pPr indent="0" marL="0">
+              <a:buNone/>
+            </a:pPr>
+            <a:r>
+              <a:rPr lang="en-US" sz="1500" b="1" dirty="0">
+                <a:solidFill>
+                  <a:srgbClr val="16173A"/>
+                </a:solidFill>
+                <a:latin typeface="Times New Roman" pitchFamily="34" charset="0"/>
+                <a:ea typeface="Times New Roman" pitchFamily="34" charset="-122"/>
+                <a:cs typeface="Times New Roman" pitchFamily="34" charset="-120"/>
+              </a:rPr>
+              <a:t>Illustrative demo values</a:t>
+            </a:r>
+            <a:endParaRPr lang="en-US" sz="1500" dirty="0"/>
+          </a:p>
+        </p:txBody>
+      </p:sp>
+      <p:sp>
+        <p:nvSpPr>
+          <p:cNvPr id="19" name="Text 17"/>
+          <p:cNvSpPr txBox="1"/>
+          <p:nvPr/>
+        </p:nvSpPr>
+        <p:spPr>
+          <a:xfrm>
+            <a:off x="4655210" y="4517136"/>
+            <a:ext cx="2881274" cy="768096"/>
+          </a:xfrm>
+          <a:prstGeom prst="rect">
+            <a:avLst/>
+          </a:prstGeom>
+          <a:noFill/>
+          <a:ln/>
+        </p:spPr>
+        <p:txBody>
+          <a:bodyPr wrap="square" lIns="0" tIns="0" rIns="0" bIns="0" rtlCol="0" anchor="ctr"/>
+          <a:lstStyle/>
+          <a:p>
+            <a:pPr indent="0" marL="0">
+              <a:lnSpc>
+                <a:spcPct val="108000"/>
+              </a:lnSpc>
+              <a:buNone/>
+            </a:pPr>
+            <a:r>
+              <a:rPr lang="en-US" sz="1250" dirty="0">
+                <a:solidFill>
+                  <a:srgbClr val="56597D"/>
+                </a:solidFill>
+                <a:latin typeface="Times New Roman" pitchFamily="34" charset="0"/>
+                <a:ea typeface="Times New Roman" pitchFamily="34" charset="-122"/>
+                <a:cs typeface="Times New Roman" pitchFamily="34" charset="-120"/>
+              </a:rPr>
+              <a:t>The built-in scenario is plausible but not drawn from a validated published source.</a:t>
+            </a:r>
+            <a:endParaRPr lang="en-US" sz="1250" dirty="0"/>
+          </a:p>
+        </p:txBody>
+      </p:sp>
+      <p:sp>
+        <p:nvSpPr>
+          <p:cNvPr id="20" name="Shape 18"/>
+          <p:cNvSpPr/>
+          <p:nvPr/>
+        </p:nvSpPr>
+        <p:spPr>
+          <a:xfrm>
+            <a:off x="8158277" y="3895344"/>
+            <a:ext cx="3466490" cy="1554480"/>
+          </a:xfrm>
+          <a:prstGeom prst="roundRect">
+            <a:avLst>
+              <a:gd name="adj" fmla="val 3529"/>
+            </a:avLst>
+          </a:prstGeom>
+          <a:solidFill>
+            <a:srgbClr val="F4F3FB"/>
+          </a:solidFill>
+          <a:ln/>
+          <a:effectLst>
+            <a:outerShdw sx="100000" sy="100000" kx="0" ky="0" algn="bl" rotWithShape="0" blurRad="127000" dist="25400" dir="5400000">
+              <a:srgbClr val="1B1B4A">
+                <a:alpha val="10000"/>
+              </a:srgbClr>
+            </a:outerShdw>
+          </a:effectLst>
+        </p:spPr>
+      </p:sp>
+      <p:sp>
+        <p:nvSpPr>
+          <p:cNvPr id="21" name="Text 19"/>
+          <p:cNvSpPr txBox="1"/>
+          <p:nvPr/>
+        </p:nvSpPr>
+        <p:spPr>
+          <a:xfrm>
+            <a:off x="8450885" y="4151376"/>
+            <a:ext cx="2881274" cy="310896"/>
+          </a:xfrm>
+          <a:prstGeom prst="rect">
+            <a:avLst/>
+          </a:prstGeom>
+          <a:noFill/>
+          <a:ln/>
+        </p:spPr>
+        <p:txBody>
+          <a:bodyPr wrap="square" lIns="0" tIns="0" rIns="0" bIns="0" rtlCol="0" anchor="ctr"/>
+          <a:lstStyle/>
+          <a:p>
+            <a:pPr indent="0" marL="0">
+              <a:buNone/>
+            </a:pPr>
+            <a:r>
+              <a:rPr lang="en-US" sz="1500" b="1" dirty="0">
+                <a:solidFill>
+                  <a:srgbClr val="16173A"/>
+                </a:solidFill>
+                <a:latin typeface="Times New Roman" pitchFamily="34" charset="0"/>
+                <a:ea typeface="Times New Roman" pitchFamily="34" charset="-122"/>
+                <a:cs typeface="Times New Roman" pitchFamily="34" charset="-120"/>
+              </a:rPr>
+              <a:t>Free-tier hosting</a:t>
+            </a:r>
+            <a:endParaRPr lang="en-US" sz="1500" dirty="0"/>
+          </a:p>
+        </p:txBody>
+      </p:sp>
+      <p:sp>
+        <p:nvSpPr>
+          <p:cNvPr id="22" name="Text 20"/>
+          <p:cNvSpPr txBox="1"/>
+          <p:nvPr/>
+        </p:nvSpPr>
+        <p:spPr>
+          <a:xfrm>
+            <a:off x="8450885" y="4517136"/>
+            <a:ext cx="2881274" cy="768096"/>
+          </a:xfrm>
+          <a:prstGeom prst="rect">
+            <a:avLst/>
+          </a:prstGeom>
+          <a:noFill/>
+          <a:ln/>
+        </p:spPr>
+        <p:txBody>
+          <a:bodyPr wrap="square" lIns="0" tIns="0" rIns="0" bIns="0" rtlCol="0" anchor="ctr"/>
+          <a:lstStyle/>
+          <a:p>
+            <a:pPr indent="0" marL="0">
+              <a:lnSpc>
+                <a:spcPct val="108000"/>
+              </a:lnSpc>
+              <a:buNone/>
+            </a:pPr>
+            <a:r>
+              <a:rPr lang="en-US" sz="1250" dirty="0">
+                <a:solidFill>
+                  <a:srgbClr val="56597D"/>
+                </a:solidFill>
+                <a:latin typeface="Times New Roman" pitchFamily="34" charset="0"/>
+                <a:ea typeface="Times New Roman" pitchFamily="34" charset="-122"/>
+                <a:cs typeface="Times New Roman" pitchFamily="34" charset="-120"/>
+              </a:rPr>
               <a:t>The instance sleeps after 15 minutes and the free database expires after 30 days, which is why the tool runs without one.</a:t>
             </a:r>
             <a:endParaRPr lang="en-US" sz="1250" dirty="0"/>
@@ -6421,7 +8035,7 @@
                 <a:ea typeface="Times New Roman" pitchFamily="34" charset="-122"/>
                 <a:cs typeface="Times New Roman" pitchFamily="34" charset="-120"/>
               </a:rPr>
-              <a:t>14</a:t>
+              <a:t>15</a:t>
             </a:r>
             <a:endParaRPr lang="en-US" sz="1050" dirty="0"/>
           </a:p>
@@ -10748,12 +12362,12 @@
         </p:nvSpPr>
         <p:spPr>
           <a:xfrm>
-            <a:off x="566928" y="2029968"/>
-            <a:ext cx="11057839" cy="1481328"/>
+            <a:off x="566928" y="2011680"/>
+            <a:ext cx="11057839" cy="1444752"/>
           </a:xfrm>
           <a:prstGeom prst="roundRect">
             <a:avLst>
-              <a:gd name="adj" fmla="val 3704"/>
+              <a:gd name="adj" fmla="val 3797"/>
             </a:avLst>
           </a:prstGeom>
           <a:solidFill>
@@ -10777,7 +12391,7 @@
         </p:nvSpPr>
         <p:spPr>
           <a:xfrm>
-            <a:off x="932688" y="2231136"/>
+            <a:off x="932688" y="2212848"/>
             <a:ext cx="10326319" cy="237744"/>
           </a:xfrm>
           <a:prstGeom prst="rect">
@@ -10816,12 +12430,12 @@
         </p:nvSpPr>
         <p:spPr>
           <a:xfrm>
-            <a:off x="932688" y="2542032"/>
-            <a:ext cx="2430704" cy="731520"/>
+            <a:off x="932688" y="2523744"/>
+            <a:ext cx="2430704" cy="694944"/>
           </a:xfrm>
           <a:prstGeom prst="roundRect">
             <a:avLst>
-              <a:gd name="adj" fmla="val 7500"/>
+              <a:gd name="adj" fmla="val 7895"/>
             </a:avLst>
           </a:prstGeom>
           <a:solidFill>
@@ -10838,7 +12452,7 @@
         </p:nvSpPr>
         <p:spPr>
           <a:xfrm>
-            <a:off x="1078992" y="2651760"/>
+            <a:off x="1078992" y="2633472"/>
             <a:ext cx="2138096" cy="256032"/>
           </a:xfrm>
           <a:prstGeom prst="rect">
@@ -10877,7 +12491,7 @@
         </p:nvSpPr>
         <p:spPr>
           <a:xfrm>
-            <a:off x="1078992" y="2907792"/>
+            <a:off x="1078992" y="2889504"/>
             <a:ext cx="2138096" cy="292608"/>
           </a:xfrm>
           <a:prstGeom prst="rect">
@@ -10919,12 +12533,12 @@
         </p:nvSpPr>
         <p:spPr>
           <a:xfrm>
-            <a:off x="3564560" y="2542032"/>
-            <a:ext cx="2430704" cy="731520"/>
+            <a:off x="3564560" y="2523744"/>
+            <a:ext cx="2430704" cy="694944"/>
           </a:xfrm>
           <a:prstGeom prst="roundRect">
             <a:avLst>
-              <a:gd name="adj" fmla="val 7500"/>
+              <a:gd name="adj" fmla="val 7895"/>
             </a:avLst>
           </a:prstGeom>
           <a:solidFill>
@@ -10941,7 +12555,7 @@
         </p:nvSpPr>
         <p:spPr>
           <a:xfrm>
-            <a:off x="3710864" y="2651760"/>
+            <a:off x="3710864" y="2633472"/>
             <a:ext cx="2138096" cy="256032"/>
           </a:xfrm>
           <a:prstGeom prst="rect">
@@ -10980,7 +12594,7 @@
         </p:nvSpPr>
         <p:spPr>
           <a:xfrm>
-            <a:off x="3710864" y="2907792"/>
+            <a:off x="3710864" y="2889504"/>
             <a:ext cx="2138096" cy="292608"/>
           </a:xfrm>
           <a:prstGeom prst="rect">
@@ -11022,12 +12636,12 @@
         </p:nvSpPr>
         <p:spPr>
           <a:xfrm>
-            <a:off x="6196432" y="2542032"/>
-            <a:ext cx="2430704" cy="731520"/>
+            <a:off x="6196432" y="2523744"/>
+            <a:ext cx="2430704" cy="694944"/>
           </a:xfrm>
           <a:prstGeom prst="roundRect">
             <a:avLst>
-              <a:gd name="adj" fmla="val 7500"/>
+              <a:gd name="adj" fmla="val 7895"/>
             </a:avLst>
           </a:prstGeom>
           <a:solidFill>
@@ -11044,7 +12658,7 @@
         </p:nvSpPr>
         <p:spPr>
           <a:xfrm>
-            <a:off x="6342736" y="2651760"/>
+            <a:off x="6342736" y="2633472"/>
             <a:ext cx="2138096" cy="256032"/>
           </a:xfrm>
           <a:prstGeom prst="rect">
@@ -11083,7 +12697,7 @@
         </p:nvSpPr>
         <p:spPr>
           <a:xfrm>
-            <a:off x="6342736" y="2907792"/>
+            <a:off x="6342736" y="2889504"/>
             <a:ext cx="2138096" cy="292608"/>
           </a:xfrm>
           <a:prstGeom prst="rect">
@@ -11125,12 +12739,12 @@
         </p:nvSpPr>
         <p:spPr>
           <a:xfrm>
-            <a:off x="8828303" y="2542032"/>
-            <a:ext cx="2430704" cy="731520"/>
+            <a:off x="8828303" y="2523744"/>
+            <a:ext cx="2430704" cy="694944"/>
           </a:xfrm>
           <a:prstGeom prst="roundRect">
             <a:avLst>
-              <a:gd name="adj" fmla="val 7500"/>
+              <a:gd name="adj" fmla="val 7895"/>
             </a:avLst>
           </a:prstGeom>
           <a:solidFill>
@@ -11147,7 +12761,7 @@
         </p:nvSpPr>
         <p:spPr>
           <a:xfrm>
-            <a:off x="8974607" y="2651760"/>
+            <a:off x="8974607" y="2633472"/>
             <a:ext cx="2138096" cy="256032"/>
           </a:xfrm>
           <a:prstGeom prst="rect">
@@ -11186,7 +12800,7 @@
         </p:nvSpPr>
         <p:spPr>
           <a:xfrm>
-            <a:off x="8974607" y="2907792"/>
+            <a:off x="8974607" y="2889504"/>
             <a:ext cx="2138096" cy="292608"/>
           </a:xfrm>
           <a:prstGeom prst="rect">
@@ -11228,7 +12842,7 @@
         </p:nvSpPr>
         <p:spPr>
           <a:xfrm>
-            <a:off x="932688" y="3584448"/>
+            <a:off x="932688" y="3529584"/>
             <a:ext cx="3657600" cy="237744"/>
           </a:xfrm>
           <a:prstGeom prst="rect">
@@ -11267,12 +12881,12 @@
         </p:nvSpPr>
         <p:spPr>
           <a:xfrm>
-            <a:off x="566928" y="3785616"/>
-            <a:ext cx="11057839" cy="1481328"/>
+            <a:off x="566928" y="3712464"/>
+            <a:ext cx="11057839" cy="1444752"/>
           </a:xfrm>
           <a:prstGeom prst="roundRect">
             <a:avLst>
-              <a:gd name="adj" fmla="val 3704"/>
+              <a:gd name="adj" fmla="val 3797"/>
             </a:avLst>
           </a:prstGeom>
           <a:solidFill>
@@ -11296,7 +12910,7 @@
         </p:nvSpPr>
         <p:spPr>
           <a:xfrm>
-            <a:off x="932688" y="3986784"/>
+            <a:off x="932688" y="3913632"/>
             <a:ext cx="10326319" cy="237744"/>
           </a:xfrm>
           <a:prstGeom prst="rect">
@@ -11335,12 +12949,12 @@
         </p:nvSpPr>
         <p:spPr>
           <a:xfrm>
-            <a:off x="932688" y="4297680"/>
-            <a:ext cx="2430704" cy="731520"/>
+            <a:off x="932688" y="4224528"/>
+            <a:ext cx="2430704" cy="694944"/>
           </a:xfrm>
           <a:prstGeom prst="roundRect">
             <a:avLst>
-              <a:gd name="adj" fmla="val 7500"/>
+              <a:gd name="adj" fmla="val 7895"/>
             </a:avLst>
           </a:prstGeom>
           <a:solidFill>
@@ -11357,7 +12971,7 @@
         </p:nvSpPr>
         <p:spPr>
           <a:xfrm>
-            <a:off x="1078992" y="4407408"/>
+            <a:off x="1078992" y="4334256"/>
             <a:ext cx="2138096" cy="256032"/>
           </a:xfrm>
           <a:prstGeom prst="rect">
@@ -11396,7 +13010,7 @@
         </p:nvSpPr>
         <p:spPr>
           <a:xfrm>
-            <a:off x="1078992" y="4663440"/>
+            <a:off x="1078992" y="4590288"/>
             <a:ext cx="2138096" cy="292608"/>
           </a:xfrm>
           <a:prstGeom prst="rect">
@@ -11438,12 +13052,12 @@
         </p:nvSpPr>
         <p:spPr>
           <a:xfrm>
-            <a:off x="3564560" y="4297680"/>
-            <a:ext cx="2430704" cy="731520"/>
+            <a:off x="3564560" y="4224528"/>
+            <a:ext cx="2430704" cy="694944"/>
           </a:xfrm>
           <a:prstGeom prst="roundRect">
             <a:avLst>
-              <a:gd name="adj" fmla="val 7500"/>
+              <a:gd name="adj" fmla="val 7895"/>
             </a:avLst>
           </a:prstGeom>
           <a:solidFill>
@@ -11460,7 +13074,7 @@
         </p:nvSpPr>
         <p:spPr>
           <a:xfrm>
-            <a:off x="3710864" y="4407408"/>
+            <a:off x="3710864" y="4334256"/>
             <a:ext cx="2138096" cy="256032"/>
           </a:xfrm>
           <a:prstGeom prst="rect">
@@ -11499,7 +13113,7 @@
         </p:nvSpPr>
         <p:spPr>
           <a:xfrm>
-            <a:off x="3710864" y="4663440"/>
+            <a:off x="3710864" y="4590288"/>
             <a:ext cx="2138096" cy="292608"/>
           </a:xfrm>
           <a:prstGeom prst="rect">
@@ -11541,12 +13155,12 @@
         </p:nvSpPr>
         <p:spPr>
           <a:xfrm>
-            <a:off x="6196432" y="4297680"/>
-            <a:ext cx="2430704" cy="731520"/>
+            <a:off x="6196432" y="4224528"/>
+            <a:ext cx="2430704" cy="694944"/>
           </a:xfrm>
           <a:prstGeom prst="roundRect">
             <a:avLst>
-              <a:gd name="adj" fmla="val 7500"/>
+              <a:gd name="adj" fmla="val 7895"/>
             </a:avLst>
           </a:prstGeom>
           <a:solidFill>
@@ -11563,7 +13177,7 @@
         </p:nvSpPr>
         <p:spPr>
           <a:xfrm>
-            <a:off x="6342736" y="4407408"/>
+            <a:off x="6342736" y="4334256"/>
             <a:ext cx="2138096" cy="256032"/>
           </a:xfrm>
           <a:prstGeom prst="rect">
@@ -11602,7 +13216,7 @@
         </p:nvSpPr>
         <p:spPr>
           <a:xfrm>
-            <a:off x="6342736" y="4663440"/>
+            <a:off x="6342736" y="4590288"/>
             <a:ext cx="2138096" cy="292608"/>
           </a:xfrm>
           <a:prstGeom prst="rect">
@@ -11644,12 +13258,12 @@
         </p:nvSpPr>
         <p:spPr>
           <a:xfrm>
-            <a:off x="8828303" y="4297680"/>
-            <a:ext cx="2430704" cy="731520"/>
+            <a:off x="8828303" y="4224528"/>
+            <a:ext cx="2430704" cy="694944"/>
           </a:xfrm>
           <a:prstGeom prst="roundRect">
             <a:avLst>
-              <a:gd name="adj" fmla="val 7500"/>
+              <a:gd name="adj" fmla="val 7895"/>
             </a:avLst>
           </a:prstGeom>
           <a:solidFill>
@@ -11666,7 +13280,7 @@
         </p:nvSpPr>
         <p:spPr>
           <a:xfrm>
-            <a:off x="8974607" y="4407408"/>
+            <a:off x="8974607" y="4334256"/>
             <a:ext cx="2138096" cy="256032"/>
           </a:xfrm>
           <a:prstGeom prst="rect">
@@ -11705,7 +13319,7 @@
         </p:nvSpPr>
         <p:spPr>
           <a:xfrm>
-            <a:off x="8974607" y="4663440"/>
+            <a:off x="8974607" y="4590288"/>
             <a:ext cx="2138096" cy="292608"/>
           </a:xfrm>
           <a:prstGeom prst="rect">
@@ -11747,7 +13361,7 @@
         </p:nvSpPr>
         <p:spPr>
           <a:xfrm>
-            <a:off x="585216" y="5413248"/>
+            <a:off x="585216" y="5285232"/>
             <a:ext cx="11057839" cy="274320"/>
           </a:xfrm>
           <a:prstGeom prst="rect">
@@ -11800,12 +13414,12 @@
         </p:nvSpPr>
         <p:spPr>
           <a:xfrm>
-            <a:off x="566928" y="5705856"/>
-            <a:ext cx="11057839" cy="493776"/>
+            <a:off x="566928" y="5577840"/>
+            <a:ext cx="11057839" cy="640080"/>
           </a:xfrm>
           <a:prstGeom prst="roundRect">
             <a:avLst>
-              <a:gd name="adj" fmla="val 11111"/>
+              <a:gd name="adj" fmla="val 8571"/>
             </a:avLst>
           </a:prstGeom>
           <a:solidFill>
@@ -11829,8 +13443,8 @@
         </p:nvSpPr>
         <p:spPr>
           <a:xfrm>
-            <a:off x="950976" y="5815584"/>
-            <a:ext cx="10289743" cy="310896"/>
+            <a:off x="950976" y="5687568"/>
+            <a:ext cx="10289743" cy="438912"/>
           </a:xfrm>
           <a:prstGeom prst="rect">
             <a:avLst/>
@@ -11854,7 +13468,7 @@
                 <a:ea typeface="Times New Roman" pitchFamily="34" charset="-122"/>
                 <a:cs typeface="Times New Roman" pitchFamily="34" charset="-120"/>
               </a:rPr>
-              <a:t>38 unit tests passing  ·  62 source files  ·  one engine.  </a:t>
+              <a:t>67 tests passing  ·  four published analyses reproduced within 0.02%  ·  one engine.  </a:t>
             </a:r>
             <a:pPr indent="0" marL="0">
               <a:buNone/>
